--- a/docs/report/documents/Orbital-Presentation.pptx
+++ b/docs/report/documents/Orbital-Presentation.pptx
@@ -20,7 +20,6 @@
     <p:sldId id="266" r:id="rId20"/>
     <p:sldId id="267" r:id="rId21"/>
     <p:sldId id="268" r:id="rId22"/>
-    <p:sldId id="269" r:id="rId23"/>
     <p:sldId id="261" r:id="rId7"/>
   </p:sldIdLst>
   <p:sldSz cx="12192000" cy="6858000"/>
@@ -547,59 +546,6 @@
           <a:lstStyle/>
           <a:p>
             <a:r>
-              <a:t>A feed that goes dark costs freshness — which is visible and labelled — rather than costing the map, which would not be.</a:t>
-            </a:r>
-          </a:p>
-        </p:txBody>
-      </p:sp>
-    </p:spTree>
-  </p:cSld>
-  <p:clrMapOvr>
-    <a:masterClrMapping/>
-  </p:clrMapOvr>
-</p:notes>
-</file>
-
-<file path=ppt/notesSlides/notesSlide14.xml><?xml version="1.0" encoding="utf-8"?>
-<p:notes xmlns:a="http://schemas.openxmlformats.org/drawingml/2006/main" xmlns:p="http://schemas.openxmlformats.org/presentationml/2006/main" xmlns:r="http://schemas.openxmlformats.org/officeDocument/2006/relationships">
-  <p:cSld>
-    <p:spTree>
-      <p:nvGrpSpPr>
-        <p:cNvPr id="1" name=""/>
-        <p:cNvGrpSpPr/>
-        <p:nvPr/>
-      </p:nvGrpSpPr>
-      <p:grpSpPr>
-        <a:xfrm>
-          <a:off x="0" y="0"/>
-          <a:ext cx="0" cy="0"/>
-          <a:chOff x="0" y="0"/>
-          <a:chExt cx="0" cy="0"/>
-        </a:xfrm>
-      </p:grpSpPr>
-      <p:sp>
-        <p:nvSpPr>
-          <p:cNvPr id="2" name="Speaker notes"/>
-          <p:cNvSpPr txBox="1"/>
-          <p:nvPr/>
-        </p:nvSpPr>
-        <p:spPr>
-          <a:xfrm>
-            <a:off x="548640" y="548640"/>
-            <a:ext cx="5486400" cy="2926080"/>
-          </a:xfrm>
-          <a:prstGeom prst="rect">
-            <a:avLst/>
-          </a:prstGeom>
-          <a:noFill/>
-        </p:spPr>
-        <p:txBody>
-          <a:bodyPr wrap="square">
-            <a:spAutoFit/>
-          </a:bodyPr>
-          <a:lstStyle/>
-          <a:p>
-            <a:r>
               <a:t>The status bar states that 2,000 of 13,607 objects in view are drawn, how old the data is, and which feed answered. A tracker that showed a sample as though it were everything would be easier to build and would be lying.</a:t>
             </a:r>
           </a:p>
@@ -1179,7 +1125,7 @@
           <a:lstStyle/>
           <a:p>
             <a:r>
-              <a:t>R1 is the one worth dwelling on: the architecture was designed so that a feed disappearing costs one module. When it happened, that is exactly what it cost.</a:t>
+              <a:t>R1 is the one to dwell on: the architecture was designed so that a feed disappearing costs one module, and when it happened that is exactly what it cost. The full register, including the schedule risk that was also realised, is section 4.6 of the report.</a:t>
             </a:r>
           </a:p>
         </p:txBody>
@@ -2686,741 +2632,6 @@
                 </a:solidFill>
                 <a:latin typeface="Saira Medium"/>
               </a:rPr>
-              <a:t>Three of the four outcomes are failures</a:t>
-            </a:r>
-          </a:p>
-        </p:txBody>
-      </p:sp>
-      <p:sp>
-        <p:nvSpPr>
-          <p:cNvPr id="4" name="TextBox 3"/>
-          <p:cNvSpPr txBox="1"/>
-          <p:nvPr/>
-        </p:nvSpPr>
-        <p:spPr>
-          <a:xfrm>
-            <a:off x="658368" y="1133856"/>
-            <a:ext cx="10872216" cy="566928"/>
-          </a:xfrm>
-          <a:prstGeom prst="rect">
-            <a:avLst/>
-          </a:prstGeom>
-          <a:noFill/>
-        </p:spPr>
-        <p:txBody>
-          <a:bodyPr wrap="square" lIns="0" rIns="0" tIns="0" bIns="0">
-            <a:spAutoFit/>
-          </a:bodyPr>
-          <a:lstStyle/>
-          <a:p>
-            <a:pPr algn="l">
-              <a:lnSpc>
-                <a:spcPct val="115000"/>
-              </a:lnSpc>
-            </a:pPr>
-            <a:r>
-              <a:rPr sz="1300" b="0">
-                <a:solidFill>
-                  <a:srgbClr val="E5E0DF"/>
-                </a:solidFill>
-                <a:latin typeface="Roboto"/>
-              </a:rPr>
-              <a:t>An activity diagram of the happy path would be a straight line and would say nothing. The branches are the content.</a:t>
-            </a:r>
-          </a:p>
-        </p:txBody>
-      </p:sp>
-      <p:sp>
-        <p:nvSpPr>
-          <p:cNvPr id="5" name="Rounded Rectangle 4"/>
-          <p:cNvSpPr/>
-          <p:nvPr/>
-        </p:nvSpPr>
-        <p:spPr>
-          <a:xfrm>
-            <a:off x="7067251" y="1783080"/>
-            <a:ext cx="4336377" cy="4709160"/>
-          </a:xfrm>
-          <a:prstGeom prst="roundRect">
-            <a:avLst>
-              <a:gd name="adj" fmla="val 2000"/>
-            </a:avLst>
-          </a:prstGeom>
-          <a:solidFill>
-            <a:srgbClr val="FFFFFF"/>
-          </a:solidFill>
-          <a:ln w="12700">
-            <a:solidFill>
-              <a:srgbClr val="FC8337"/>
-            </a:solidFill>
-          </a:ln>
-          <a:effectLst/>
-        </p:spPr>
-        <p:style>
-          <a:lnRef idx="1">
-            <a:schemeClr val="accent1"/>
-          </a:lnRef>
-          <a:fillRef idx="3">
-            <a:schemeClr val="accent1"/>
-          </a:fillRef>
-          <a:effectRef idx="2">
-            <a:schemeClr val="accent1"/>
-          </a:effectRef>
-          <a:fontRef idx="minor">
-            <a:schemeClr val="lt1"/>
-          </a:fontRef>
-        </p:style>
-        <p:txBody>
-          <a:bodyPr rtlCol="0" anchor="ctr"/>
-          <a:lstStyle/>
-          <a:p>
-            <a:pPr algn="ctr"/>
-          </a:p>
-        </p:txBody>
-      </p:sp>
-      <p:pic>
-        <p:nvPicPr>
-          <p:cNvPr id="6" name="Picture 5" descr="5-5-activity-diagram.png"/>
-          <p:cNvPicPr>
-            <a:picLocks noChangeAspect="1"/>
-          </p:cNvPicPr>
-          <p:nvPr/>
-        </p:nvPicPr>
-        <p:blipFill>
-          <a:blip r:embed="rId3"/>
-          <a:stretch>
-            <a:fillRect/>
-          </a:stretch>
-        </p:blipFill>
-        <p:spPr>
-          <a:xfrm>
-            <a:off x="7176979" y="1892808"/>
-            <a:ext cx="4116921" cy="4489704"/>
-          </a:xfrm>
-          <a:prstGeom prst="rect">
-            <a:avLst/>
-          </a:prstGeom>
-        </p:spPr>
-      </p:pic>
-      <p:sp>
-        <p:nvSpPr>
-          <p:cNvPr id="7" name="Rounded Rectangle 6"/>
-          <p:cNvSpPr/>
-          <p:nvPr/>
-        </p:nvSpPr>
-        <p:spPr>
-          <a:xfrm>
-            <a:off x="658368" y="1965960"/>
-            <a:ext cx="5715000" cy="914400"/>
-          </a:xfrm>
-          <a:prstGeom prst="roundRect">
-            <a:avLst>
-              <a:gd name="adj" fmla="val 3000"/>
-            </a:avLst>
-          </a:prstGeom>
-          <a:solidFill>
-            <a:srgbClr val="030303"/>
-          </a:solidFill>
-          <a:ln w="9525">
-            <a:solidFill>
-              <a:srgbClr val="FC8337"/>
-            </a:solidFill>
-          </a:ln>
-          <a:effectLst/>
-        </p:spPr>
-        <p:style>
-          <a:lnRef idx="1">
-            <a:schemeClr val="accent1"/>
-          </a:lnRef>
-          <a:fillRef idx="3">
-            <a:schemeClr val="accent1"/>
-          </a:fillRef>
-          <a:effectRef idx="2">
-            <a:schemeClr val="accent1"/>
-          </a:effectRef>
-          <a:fontRef idx="minor">
-            <a:schemeClr val="lt1"/>
-          </a:fontRef>
-        </p:style>
-        <p:txBody>
-          <a:bodyPr rtlCol="0" anchor="ctr"/>
-          <a:lstStyle/>
-          <a:p>
-            <a:pPr algn="ctr"/>
-          </a:p>
-        </p:txBody>
-      </p:sp>
-      <p:sp>
-        <p:nvSpPr>
-          <p:cNvPr id="8" name="TextBox 7"/>
-          <p:cNvSpPr txBox="1"/>
-          <p:nvPr/>
-        </p:nvSpPr>
-        <p:spPr>
-          <a:xfrm>
-            <a:off x="914400" y="2112264"/>
-            <a:ext cx="5212080" cy="256032"/>
-          </a:xfrm>
-          <a:prstGeom prst="rect">
-            <a:avLst/>
-          </a:prstGeom>
-          <a:noFill/>
-        </p:spPr>
-        <p:txBody>
-          <a:bodyPr wrap="square" lIns="0" rIns="0" tIns="0" bIns="0">
-            <a:spAutoFit/>
-          </a:bodyPr>
-          <a:lstStyle/>
-          <a:p>
-            <a:pPr algn="l">
-              <a:lnSpc>
-                <a:spcPct val="100000"/>
-              </a:lnSpc>
-            </a:pPr>
-            <a:r>
-              <a:rPr sz="1450" b="0">
-                <a:solidFill>
-                  <a:srgbClr val="FFFFFF"/>
-                </a:solidFill>
-                <a:latin typeface="Saira Medium"/>
-              </a:rPr>
-              <a:t>Records returned</a:t>
-            </a:r>
-          </a:p>
-        </p:txBody>
-      </p:sp>
-      <p:sp>
-        <p:nvSpPr>
-          <p:cNvPr id="9" name="TextBox 8"/>
-          <p:cNvSpPr txBox="1"/>
-          <p:nvPr/>
-        </p:nvSpPr>
-        <p:spPr>
-          <a:xfrm>
-            <a:off x="914400" y="2468880"/>
-            <a:ext cx="5212080" cy="329184"/>
-          </a:xfrm>
-          <a:prstGeom prst="rect">
-            <a:avLst/>
-          </a:prstGeom>
-          <a:noFill/>
-        </p:spPr>
-        <p:txBody>
-          <a:bodyPr wrap="square" lIns="0" rIns="0" tIns="0" bIns="0">
-            <a:spAutoFit/>
-          </a:bodyPr>
-          <a:lstStyle/>
-          <a:p>
-            <a:pPr algn="l">
-              <a:lnSpc>
-                <a:spcPct val="115000"/>
-              </a:lnSpc>
-            </a:pPr>
-            <a:r>
-              <a:rPr sz="1150" b="0">
-                <a:solidFill>
-                  <a:srgbClr val="E5E0DF"/>
-                </a:solidFill>
-                <a:latin typeface="Roboto"/>
-              </a:rPr>
-              <a:t>Normalise, apply, reset the backoff.</a:t>
-            </a:r>
-          </a:p>
-        </p:txBody>
-      </p:sp>
-      <p:sp>
-        <p:nvSpPr>
-          <p:cNvPr id="10" name="Rounded Rectangle 9"/>
-          <p:cNvSpPr/>
-          <p:nvPr/>
-        </p:nvSpPr>
-        <p:spPr>
-          <a:xfrm>
-            <a:off x="658368" y="3044952"/>
-            <a:ext cx="5715000" cy="914400"/>
-          </a:xfrm>
-          <a:prstGeom prst="roundRect">
-            <a:avLst>
-              <a:gd name="adj" fmla="val 3000"/>
-            </a:avLst>
-          </a:prstGeom>
-          <a:solidFill>
-            <a:srgbClr val="030303"/>
-          </a:solidFill>
-          <a:ln w="9525">
-            <a:solidFill>
-              <a:srgbClr val="FC8337"/>
-            </a:solidFill>
-          </a:ln>
-          <a:effectLst/>
-        </p:spPr>
-        <p:style>
-          <a:lnRef idx="1">
-            <a:schemeClr val="accent1"/>
-          </a:lnRef>
-          <a:fillRef idx="3">
-            <a:schemeClr val="accent1"/>
-          </a:fillRef>
-          <a:effectRef idx="2">
-            <a:schemeClr val="accent1"/>
-          </a:effectRef>
-          <a:fontRef idx="minor">
-            <a:schemeClr val="lt1"/>
-          </a:fontRef>
-        </p:style>
-        <p:txBody>
-          <a:bodyPr rtlCol="0" anchor="ctr"/>
-          <a:lstStyle/>
-          <a:p>
-            <a:pPr algn="ctr"/>
-          </a:p>
-        </p:txBody>
-      </p:sp>
-      <p:sp>
-        <p:nvSpPr>
-          <p:cNvPr id="11" name="TextBox 10"/>
-          <p:cNvSpPr txBox="1"/>
-          <p:nvPr/>
-        </p:nvSpPr>
-        <p:spPr>
-          <a:xfrm>
-            <a:off x="914400" y="3191256"/>
-            <a:ext cx="5212080" cy="256032"/>
-          </a:xfrm>
-          <a:prstGeom prst="rect">
-            <a:avLst/>
-          </a:prstGeom>
-          <a:noFill/>
-        </p:spPr>
-        <p:txBody>
-          <a:bodyPr wrap="square" lIns="0" rIns="0" tIns="0" bIns="0">
-            <a:spAutoFit/>
-          </a:bodyPr>
-          <a:lstStyle/>
-          <a:p>
-            <a:pPr algn="l">
-              <a:lnSpc>
-                <a:spcPct val="100000"/>
-              </a:lnSpc>
-            </a:pPr>
-            <a:r>
-              <a:rPr sz="1450" b="0">
-                <a:solidFill>
-                  <a:srgbClr val="FFFFFF"/>
-                </a:solidFill>
-                <a:latin typeface="Saira Medium"/>
-              </a:rPr>
-              <a:t>Rate limited</a:t>
-            </a:r>
-          </a:p>
-        </p:txBody>
-      </p:sp>
-      <p:sp>
-        <p:nvSpPr>
-          <p:cNvPr id="12" name="TextBox 11"/>
-          <p:cNvSpPr txBox="1"/>
-          <p:nvPr/>
-        </p:nvSpPr>
-        <p:spPr>
-          <a:xfrm>
-            <a:off x="914400" y="3547872"/>
-            <a:ext cx="5212080" cy="329184"/>
-          </a:xfrm>
-          <a:prstGeom prst="rect">
-            <a:avLst/>
-          </a:prstGeom>
-          <a:noFill/>
-        </p:spPr>
-        <p:txBody>
-          <a:bodyPr wrap="square" lIns="0" rIns="0" tIns="0" bIns="0">
-            <a:spAutoFit/>
-          </a:bodyPr>
-          <a:lstStyle/>
-          <a:p>
-            <a:pPr algn="l">
-              <a:lnSpc>
-                <a:spcPct val="115000"/>
-              </a:lnSpc>
-            </a:pPr>
-            <a:r>
-              <a:rPr sz="1150" b="0">
-                <a:solidFill>
-                  <a:srgbClr val="E5E0DF"/>
-                </a:solidFill>
-                <a:latin typeface="Roboto"/>
-              </a:rPr>
-              <a:t>Honour Retry-After, double the backoff, keep the snapshot.</a:t>
-            </a:r>
-          </a:p>
-        </p:txBody>
-      </p:sp>
-      <p:sp>
-        <p:nvSpPr>
-          <p:cNvPr id="13" name="Rounded Rectangle 12"/>
-          <p:cNvSpPr/>
-          <p:nvPr/>
-        </p:nvSpPr>
-        <p:spPr>
-          <a:xfrm>
-            <a:off x="658368" y="4123944"/>
-            <a:ext cx="5715000" cy="914400"/>
-          </a:xfrm>
-          <a:prstGeom prst="roundRect">
-            <a:avLst>
-              <a:gd name="adj" fmla="val 3000"/>
-            </a:avLst>
-          </a:prstGeom>
-          <a:solidFill>
-            <a:srgbClr val="030303"/>
-          </a:solidFill>
-          <a:ln w="9525">
-            <a:solidFill>
-              <a:srgbClr val="FC8337"/>
-            </a:solidFill>
-          </a:ln>
-          <a:effectLst/>
-        </p:spPr>
-        <p:style>
-          <a:lnRef idx="1">
-            <a:schemeClr val="accent1"/>
-          </a:lnRef>
-          <a:fillRef idx="3">
-            <a:schemeClr val="accent1"/>
-          </a:fillRef>
-          <a:effectRef idx="2">
-            <a:schemeClr val="accent1"/>
-          </a:effectRef>
-          <a:fontRef idx="minor">
-            <a:schemeClr val="lt1"/>
-          </a:fontRef>
-        </p:style>
-        <p:txBody>
-          <a:bodyPr rtlCol="0" anchor="ctr"/>
-          <a:lstStyle/>
-          <a:p>
-            <a:pPr algn="ctr"/>
-          </a:p>
-        </p:txBody>
-      </p:sp>
-      <p:sp>
-        <p:nvSpPr>
-          <p:cNvPr id="14" name="TextBox 13"/>
-          <p:cNvSpPr txBox="1"/>
-          <p:nvPr/>
-        </p:nvSpPr>
-        <p:spPr>
-          <a:xfrm>
-            <a:off x="914400" y="4270248"/>
-            <a:ext cx="5212080" cy="256032"/>
-          </a:xfrm>
-          <a:prstGeom prst="rect">
-            <a:avLst/>
-          </a:prstGeom>
-          <a:noFill/>
-        </p:spPr>
-        <p:txBody>
-          <a:bodyPr wrap="square" lIns="0" rIns="0" tIns="0" bIns="0">
-            <a:spAutoFit/>
-          </a:bodyPr>
-          <a:lstStyle/>
-          <a:p>
-            <a:pPr algn="l">
-              <a:lnSpc>
-                <a:spcPct val="100000"/>
-              </a:lnSpc>
-            </a:pPr>
-            <a:r>
-              <a:rPr sz="1450" b="0">
-                <a:solidFill>
-                  <a:srgbClr val="FFFFFF"/>
-                </a:solidFill>
-                <a:latin typeface="Saira Medium"/>
-              </a:rPr>
-              <a:t>Unavailable</a:t>
-            </a:r>
-          </a:p>
-        </p:txBody>
-      </p:sp>
-      <p:sp>
-        <p:nvSpPr>
-          <p:cNvPr id="15" name="TextBox 14"/>
-          <p:cNvSpPr txBox="1"/>
-          <p:nvPr/>
-        </p:nvSpPr>
-        <p:spPr>
-          <a:xfrm>
-            <a:off x="914400" y="4626864"/>
-            <a:ext cx="5212080" cy="329184"/>
-          </a:xfrm>
-          <a:prstGeom prst="rect">
-            <a:avLst/>
-          </a:prstGeom>
-          <a:noFill/>
-        </p:spPr>
-        <p:txBody>
-          <a:bodyPr wrap="square" lIns="0" rIns="0" tIns="0" bIns="0">
-            <a:spAutoFit/>
-          </a:bodyPr>
-          <a:lstStyle/>
-          <a:p>
-            <a:pPr algn="l">
-              <a:lnSpc>
-                <a:spcPct val="115000"/>
-              </a:lnSpc>
-            </a:pPr>
-            <a:r>
-              <a:rPr sz="1150" b="0">
-                <a:solidFill>
-                  <a:srgbClr val="E5E0DF"/>
-                </a:solidFill>
-                <a:latin typeface="Roboto"/>
-              </a:rPr>
-              <a:t>Keep the previous snapshot. Mark the store stale.</a:t>
-            </a:r>
-          </a:p>
-        </p:txBody>
-      </p:sp>
-      <p:sp>
-        <p:nvSpPr>
-          <p:cNvPr id="16" name="Rounded Rectangle 15"/>
-          <p:cNvSpPr/>
-          <p:nvPr/>
-        </p:nvSpPr>
-        <p:spPr>
-          <a:xfrm>
-            <a:off x="658368" y="5202936"/>
-            <a:ext cx="5715000" cy="914400"/>
-          </a:xfrm>
-          <a:prstGeom prst="roundRect">
-            <a:avLst>
-              <a:gd name="adj" fmla="val 3000"/>
-            </a:avLst>
-          </a:prstGeom>
-          <a:solidFill>
-            <a:srgbClr val="030303"/>
-          </a:solidFill>
-          <a:ln w="9525">
-            <a:solidFill>
-              <a:srgbClr val="FC8337"/>
-            </a:solidFill>
-          </a:ln>
-          <a:effectLst/>
-        </p:spPr>
-        <p:style>
-          <a:lnRef idx="1">
-            <a:schemeClr val="accent1"/>
-          </a:lnRef>
-          <a:fillRef idx="3">
-            <a:schemeClr val="accent1"/>
-          </a:fillRef>
-          <a:effectRef idx="2">
-            <a:schemeClr val="accent1"/>
-          </a:effectRef>
-          <a:fontRef idx="minor">
-            <a:schemeClr val="lt1"/>
-          </a:fontRef>
-        </p:style>
-        <p:txBody>
-          <a:bodyPr rtlCol="0" anchor="ctr"/>
-          <a:lstStyle/>
-          <a:p>
-            <a:pPr algn="ctr"/>
-          </a:p>
-        </p:txBody>
-      </p:sp>
-      <p:sp>
-        <p:nvSpPr>
-          <p:cNvPr id="17" name="TextBox 16"/>
-          <p:cNvSpPr txBox="1"/>
-          <p:nvPr/>
-        </p:nvSpPr>
-        <p:spPr>
-          <a:xfrm>
-            <a:off x="914400" y="5349240"/>
-            <a:ext cx="5212080" cy="256032"/>
-          </a:xfrm>
-          <a:prstGeom prst="rect">
-            <a:avLst/>
-          </a:prstGeom>
-          <a:noFill/>
-        </p:spPr>
-        <p:txBody>
-          <a:bodyPr wrap="square" lIns="0" rIns="0" tIns="0" bIns="0">
-            <a:spAutoFit/>
-          </a:bodyPr>
-          <a:lstStyle/>
-          <a:p>
-            <a:pPr algn="l">
-              <a:lnSpc>
-                <a:spcPct val="100000"/>
-              </a:lnSpc>
-            </a:pPr>
-            <a:r>
-              <a:rPr sz="1450" b="0">
-                <a:solidFill>
-                  <a:srgbClr val="FFFFFF"/>
-                </a:solidFill>
-                <a:latin typeface="Saira Medium"/>
-              </a:rPr>
-              <a:t>Bad response</a:t>
-            </a:r>
-          </a:p>
-        </p:txBody>
-      </p:sp>
-      <p:sp>
-        <p:nvSpPr>
-          <p:cNvPr id="18" name="TextBox 17"/>
-          <p:cNvSpPr txBox="1"/>
-          <p:nvPr/>
-        </p:nvSpPr>
-        <p:spPr>
-          <a:xfrm>
-            <a:off x="914400" y="5705855"/>
-            <a:ext cx="5212080" cy="329184"/>
-          </a:xfrm>
-          <a:prstGeom prst="rect">
-            <a:avLst/>
-          </a:prstGeom>
-          <a:noFill/>
-        </p:spPr>
-        <p:txBody>
-          <a:bodyPr wrap="square" lIns="0" rIns="0" tIns="0" bIns="0">
-            <a:spAutoFit/>
-          </a:bodyPr>
-          <a:lstStyle/>
-          <a:p>
-            <a:pPr algn="l">
-              <a:lnSpc>
-                <a:spcPct val="115000"/>
-              </a:lnSpc>
-            </a:pPr>
-            <a:r>
-              <a:rPr sz="1150" b="0">
-                <a:solidFill>
-                  <a:srgbClr val="E5E0DF"/>
-                </a:solidFill>
-                <a:latin typeface="Roboto"/>
-              </a:rPr>
-              <a:t>A malformed answer is treated as no answer.</a:t>
-            </a:r>
-          </a:p>
-        </p:txBody>
-      </p:sp>
-      <p:sp>
-        <p:nvSpPr>
-          <p:cNvPr id="19" name="TextBox 18"/>
-          <p:cNvSpPr txBox="1"/>
-          <p:nvPr/>
-        </p:nvSpPr>
-        <p:spPr>
-          <a:xfrm>
-            <a:off x="658368" y="6327648"/>
-            <a:ext cx="5715000" cy="365760"/>
-          </a:xfrm>
-          <a:prstGeom prst="rect">
-            <a:avLst/>
-          </a:prstGeom>
-          <a:noFill/>
-        </p:spPr>
-        <p:txBody>
-          <a:bodyPr wrap="square" lIns="0" rIns="0" tIns="0" bIns="0">
-            <a:spAutoFit/>
-          </a:bodyPr>
-          <a:lstStyle/>
-          <a:p>
-            <a:pPr algn="l">
-              <a:lnSpc>
-                <a:spcPct val="100000"/>
-              </a:lnSpc>
-            </a:pPr>
-            <a:r>
-              <a:rPr sz="1300" b="0">
-                <a:solidFill>
-                  <a:srgbClr val="FC8337"/>
-                </a:solidFill>
-                <a:latin typeface="Saira Medium"/>
-              </a:rPr>
-              <a:t>None of the three failures empties the store.</a:t>
-            </a:r>
-          </a:p>
-        </p:txBody>
-      </p:sp>
-    </p:spTree>
-  </p:cSld>
-  <p:clrMapOvr>
-    <a:masterClrMapping/>
-  </p:clrMapOvr>
-</p:sld>
-</file>
-
-<file path=ppt/slides/slide14.xml><?xml version="1.0" encoding="utf-8"?>
-<p:sld xmlns:a="http://schemas.openxmlformats.org/drawingml/2006/main" xmlns:p="http://schemas.openxmlformats.org/presentationml/2006/main" xmlns:r="http://schemas.openxmlformats.org/officeDocument/2006/relationships">
-  <p:cSld>
-    <p:spTree>
-      <p:nvGrpSpPr>
-        <p:cNvPr id="1" name=""/>
-        <p:cNvGrpSpPr/>
-        <p:nvPr/>
-      </p:nvGrpSpPr>
-      <p:grpSpPr/>
-      <p:pic>
-        <p:nvPicPr>
-          <p:cNvPr id="2" name="Picture 1" descr="image.png"/>
-          <p:cNvPicPr>
-            <a:picLocks noChangeAspect="1"/>
-          </p:cNvPicPr>
-          <p:nvPr/>
-        </p:nvPicPr>
-        <p:blipFill>
-          <a:blip r:embed="rId2"/>
-          <a:stretch>
-            <a:fillRect/>
-          </a:stretch>
-        </p:blipFill>
-        <p:spPr>
-          <a:xfrm>
-            <a:off x="11027256" y="6531519"/>
-            <a:ext cx="1164744" cy="326481"/>
-          </a:xfrm>
-          <a:prstGeom prst="rect">
-            <a:avLst/>
-          </a:prstGeom>
-        </p:spPr>
-      </p:pic>
-      <p:sp>
-        <p:nvSpPr>
-          <p:cNvPr id="3" name="TextBox 2"/>
-          <p:cNvSpPr txBox="1"/>
-          <p:nvPr/>
-        </p:nvSpPr>
-        <p:spPr>
-          <a:xfrm>
-            <a:off x="658368" y="475488"/>
-            <a:ext cx="10872216" cy="640080"/>
-          </a:xfrm>
-          <a:prstGeom prst="rect">
-            <a:avLst/>
-          </a:prstGeom>
-          <a:noFill/>
-        </p:spPr>
-        <p:txBody>
-          <a:bodyPr wrap="square" lIns="0" rIns="0" tIns="0" bIns="0">
-            <a:spAutoFit/>
-          </a:bodyPr>
-          <a:lstStyle/>
-          <a:p>
-            <a:pPr algn="l">
-              <a:lnSpc>
-                <a:spcPct val="100000"/>
-              </a:lnSpc>
-            </a:pPr>
-            <a:r>
-              <a:rPr sz="3350" b="0">
-                <a:solidFill>
-                  <a:srgbClr val="FFFFFF"/>
-                </a:solidFill>
-                <a:latin typeface="Saira Medium"/>
-              </a:rPr>
               <a:t>The interface, and the honesty line</a:t>
             </a:r>
           </a:p>
@@ -7499,7 +6710,7 @@
                 </a:solidFill>
                 <a:latin typeface="Saira Medium"/>
               </a:rPr>
-              <a:t>Risk: two of them actually happened</a:t>
+              <a:t>Risks, and what they cost</a:t>
             </a:r>
           </a:p>
         </p:txBody>
@@ -7538,7 +6749,7 @@
                 </a:solidFill>
                 <a:latin typeface="Roboto"/>
               </a:rPr>
-              <a:t>A register listing only the risks that were survived cheaply is not a register. Both realised risks are shown with what they actually cost.</a:t>
+              <a:t>Graded by likelihood and impact, each with the mitigation that was actually built. One of them happened.</a:t>
             </a:r>
           </a:p>
         </p:txBody>
@@ -7664,7 +6875,7 @@
                 </a:solidFill>
                 <a:latin typeface="Saira Medium"/>
               </a:rPr>
-              <a:t>REALISED</a:t>
+              <a:t>HAPPENED</a:t>
             </a:r>
           </a:p>
         </p:txBody>
@@ -7766,7 +6977,7 @@
           <a:solidFill>
             <a:srgbClr val="030303"/>
           </a:solidFill>
-          <a:ln w="22225">
+          <a:ln w="9525">
             <a:solidFill>
               <a:srgbClr val="FC8337"/>
             </a:solidFill>
@@ -7829,7 +7040,7 @@
                 </a:solidFill>
                 <a:latin typeface="Saira Medium"/>
               </a:rPr>
-              <a:t>R7  A defect resists diagnosis</a:t>
+              <a:t>R2  Rate limited or banned</a:t>
             </a:r>
           </a:p>
         </p:txBody>
@@ -7864,11 +7075,11 @@
             <a:r>
               <a:rPr sz="900" b="0">
                 <a:solidFill>
-                  <a:srgbClr val="FC8337"/>
+                  <a:srgbClr val="E5E0DF"/>
                 </a:solidFill>
                 <a:latin typeface="Saira Medium"/>
               </a:rPr>
-              <a:t>REALISED</a:t>
+              <a:t>HELD</a:t>
             </a:r>
           </a:p>
         </p:txBody>
@@ -7907,7 +7118,7 @@
                 </a:solidFill>
                 <a:latin typeface="Roboto"/>
               </a:rPr>
-              <a:t>One defect misdiagnosed five times across six working sessions.</a:t>
+              <a:t>One backend for all viewers; limits measured, not assumed.</a:t>
             </a:r>
           </a:p>
         </p:txBody>
@@ -7942,11 +7153,11 @@
             <a:r>
               <a:rPr sz="1150" b="0">
                 <a:solidFill>
-                  <a:srgbClr val="FC8337"/>
+                  <a:srgbClr val="E5E0DF"/>
                 </a:solidFill>
                 <a:latin typeface="Roboto"/>
               </a:rPr>
-              <a:t>Cause was structural. The fix deleted 376 lines, added 130, and cost no feature.</a:t>
+              <a:t>Four requests a minute against a measured cap of five.</a:t>
             </a:r>
           </a:p>
         </p:txBody>
@@ -8033,7 +7244,7 @@
                 </a:solidFill>
                 <a:latin typeface="Saira Medium"/>
               </a:rPr>
-              <a:t>R2  Rate limited or banned</a:t>
+              <a:t>R4  Browser cannot draw the count</a:t>
             </a:r>
           </a:p>
         </p:txBody>
@@ -8111,7 +7322,7 @@
                 </a:solidFill>
                 <a:latin typeface="Roboto"/>
               </a:rPr>
-              <a:t>One backend for all viewers; limits measured, not assumed.</a:t>
+              <a:t>40,000 objects is not a legible map at any frame rate.</a:t>
             </a:r>
           </a:p>
         </p:txBody>
@@ -8150,7 +7361,7 @@
                 </a:solidFill>
                 <a:latin typeface="Roboto"/>
               </a:rPr>
-              <a:t>Four requests a minute against a measured cap of five.</a:t>
+              <a:t>Responses thinned to 2,000; one layer at a time; positions interpolated between polls.</a:t>
             </a:r>
           </a:p>
         </p:txBody>
@@ -8237,7 +7448,7 @@
                 </a:solidFill>
                 <a:latin typeface="Saira Medium"/>
               </a:rPr>
-              <a:t>R4  Browser cannot draw the count</a:t>
+              <a:t>R7  A defect resists diagnosis</a:t>
             </a:r>
           </a:p>
         </p:txBody>
@@ -8315,7 +7526,7 @@
                 </a:solidFill>
                 <a:latin typeface="Roboto"/>
               </a:rPr>
-              <a:t>40,000 objects is not a legible map at any frame rate.</a:t>
+              <a:t>Schedule risk: one hard defect can consume a phase.</a:t>
             </a:r>
           </a:p>
         </p:txBody>
@@ -8354,7 +7565,7 @@
                 </a:solidFill>
                 <a:latin typeface="Roboto"/>
               </a:rPr>
-              <a:t>Responses thinned to 2,000; one layer at a time; positions interpolated between polls.</a:t>
+              <a:t>Every defect logged with how it was found. A fix counts as fixed when demonstrated, not when written.</a:t>
             </a:r>
           </a:p>
         </p:txBody>

--- a/docs/report/documents/Orbital-Presentation.pptx
+++ b/docs/report/documents/Orbital-Presentation.pptx
@@ -4645,22 +4645,22 @@
       </p:pic>
       <p:pic>
         <p:nvPicPr>
-          <p:cNvPr id="10" name="Backend cost per stage chart"/>
+          <p:cNvPr id="9" name="Picture 8" descr="2-1-backend-cost-per-stage.png"/>
           <p:cNvPicPr>
             <a:picLocks noChangeAspect="1"/>
           </p:cNvPicPr>
           <p:nvPr/>
         </p:nvPicPr>
         <p:blipFill>
-          <a:blip r:embed="rId4"/>
+          <a:blip r:embed="rId5"/>
           <a:stretch>
             <a:fillRect/>
           </a:stretch>
         </p:blipFill>
         <p:spPr>
           <a:xfrm>
-            <a:off x="4800000" y="1700000"/>
-            <a:ext cx="6600000" cy="4620000"/>
+            <a:off x="4800000" y="2049460"/>
+            <a:ext cx="6600000" cy="3921079"/>
           </a:xfrm>
           <a:prstGeom prst="rect">
             <a:avLst/>
@@ -5191,36 +5191,6 @@
       </p:sp>
       <p:pic>
         <p:nvPicPr>
-          <p:cNvPr id="22" name="Picture 21">
-            <a:extLst>
-              <a:ext uri="{FF2B5EF4-FFF2-40B4-BE49-F238E27FC236}">
-                <a16:creationId xmlns:a16="http://schemas.microsoft.com/office/drawing/2014/main" id="{FD40B81A-2200-85C7-7CF0-578FDA298FE5}"/>
-              </a:ext>
-            </a:extLst>
-          </p:cNvPr>
-          <p:cNvPicPr>
-            <a:picLocks noChangeAspect="1"/>
-          </p:cNvPicPr>
-          <p:nvPr/>
-        </p:nvPicPr>
-        <p:blipFill>
-          <a:blip r:embed="rId5"/>
-          <a:stretch>
-            <a:fillRect/>
-          </a:stretch>
-        </p:blipFill>
-        <p:spPr>
-          <a:xfrm>
-            <a:off x="6588388" y="2040555"/>
-            <a:ext cx="4863147" cy="3212288"/>
-          </a:xfrm>
-          <a:prstGeom prst="rect">
-            <a:avLst/>
-          </a:prstGeom>
-        </p:spPr>
-      </p:pic>
-      <p:pic>
-        <p:nvPicPr>
           <p:cNvPr id="24" name="Picture 23">
             <a:extLst>
               <a:ext uri="{FF2B5EF4-FFF2-40B4-BE49-F238E27FC236}">
@@ -5243,6 +5213,30 @@
           <a:xfrm>
             <a:off x="11027256" y="6531519"/>
             <a:ext cx="1164744" cy="326481"/>
+          </a:xfrm>
+          <a:prstGeom prst="rect">
+            <a:avLst/>
+          </a:prstGeom>
+        </p:spPr>
+      </p:pic>
+      <p:pic>
+        <p:nvPicPr>
+          <p:cNvPr id="25" name="Picture 24" descr="3-1-use-case-diagram-slide.png"/>
+          <p:cNvPicPr>
+            <a:picLocks noChangeAspect="1"/>
+          </p:cNvPicPr>
+          <p:nvPr/>
+        </p:nvPicPr>
+        <p:blipFill>
+          <a:blip r:embed="rId7"/>
+          <a:stretch>
+            <a:fillRect/>
+          </a:stretch>
+        </p:blipFill>
+        <p:spPr>
+          <a:xfrm>
+            <a:off x="6475272" y="1984248"/>
+            <a:ext cx="5246015" cy="3374136"/>
           </a:xfrm>
           <a:prstGeom prst="rect">
             <a:avLst/>
@@ -7244,7 +7238,7 @@
                 </a:solidFill>
                 <a:latin typeface="Saira Medium"/>
               </a:rPr>
-              <a:t>R4  Browser cannot draw the count</a:t>
+              <a:t>R3  A licence forbids the use</a:t>
             </a:r>
           </a:p>
         </p:txBody>
@@ -7322,7 +7316,7 @@
                 </a:solidFill>
                 <a:latin typeface="Roboto"/>
               </a:rPr>
-              <a:t>40,000 objects is not a legible map at any frame rate.</a:t>
+              <a:t>OpenSky is non-commercial. A paid version cannot use it.</a:t>
             </a:r>
           </a:p>
         </p:txBody>
@@ -7361,7 +7355,7 @@
                 </a:solidFill>
                 <a:latin typeface="Roboto"/>
               </a:rPr>
-              <a:t>Responses thinned to 2,000; one layer at a time; positions interpolated between polls.</a:t>
+              <a:t>Licences recorded per source. Stated in §2.2 as a finding rather than assumed away.</a:t>
             </a:r>
           </a:p>
         </p:txBody>
@@ -7448,7 +7442,7 @@
                 </a:solidFill>
                 <a:latin typeface="Saira Medium"/>
               </a:rPr>
-              <a:t>R7  A defect resists diagnosis</a:t>
+              <a:t>R4  A defect resists diagnosis</a:t>
             </a:r>
           </a:p>
         </p:txBody>

--- a/docs/report/documents/Orbital-Presentation.pptx
+++ b/docs/report/documents/Orbital-Presentation.pptx
@@ -7238,7 +7238,7 @@
                 </a:solidFill>
                 <a:latin typeface="Saira Medium"/>
               </a:rPr>
-              <a:t>R3  A licence forbids the use</a:t>
+              <a:t>R3  Secrets reach the repository</a:t>
             </a:r>
           </a:p>
         </p:txBody>
@@ -7316,7 +7316,7 @@
                 </a:solidFill>
                 <a:latin typeface="Roboto"/>
               </a:rPr>
-              <a:t>OpenSky is non-commercial. A paid version cannot use it.</a:t>
+              <a:t>A credential in git is public the moment the repository is.</a:t>
             </a:r>
           </a:p>
         </p:txBody>
@@ -7355,7 +7355,7 @@
                 </a:solidFill>
                 <a:latin typeface="Roboto"/>
               </a:rPr>
-              <a:t>Licences recorded per source. Stated in §2.2 as a finding rather than assumed away.</a:t>
+              <a:t>Credentials in environment variables only. Configuration is never printed as an object — one field at a time.</a:t>
             </a:r>
           </a:p>
         </p:txBody>
@@ -7442,7 +7442,7 @@
                 </a:solidFill>
                 <a:latin typeface="Saira Medium"/>
               </a:rPr>
-              <a:t>R4  A defect resists diagnosis</a:t>
+              <a:t>R4  Work serialises behind one person</a:t>
             </a:r>
           </a:p>
         </p:txBody>
@@ -7520,7 +7520,7 @@
                 </a:solidFill>
                 <a:latin typeface="Roboto"/>
               </a:rPr>
-              <a:t>Schedule risk: one hard defect can consume a phase.</a:t>
+              <a:t>Five part-time students: if the layers queue, the schedule goes.</a:t>
             </a:r>
           </a:p>
         </p:txBody>
@@ -7559,7 +7559,7 @@
                 </a:solidFill>
                 <a:latin typeface="Roboto"/>
               </a:rPr>
-              <a:t>Every defect logged with how it was found. A fix counts as fixed when demonstrated, not when written.</a:t>
+              <a:t>The shared data shape was fixed before any provider was written, so the three layers proceed in parallel.</a:t>
             </a:r>
           </a:p>
         </p:txBody>

--- a/docs/report/documents/Orbital-Presentation.pptx
+++ b/docs/report/documents/Orbital-Presentation.pptx
@@ -7238,7 +7238,7 @@
                 </a:solidFill>
                 <a:latin typeface="Saira Medium"/>
               </a:rPr>
-              <a:t>R3  Secrets reach the repository</a:t>
+              <a:t>R3  Browser cannot draw the count</a:t>
             </a:r>
           </a:p>
         </p:txBody>
@@ -7316,7 +7316,7 @@
                 </a:solidFill>
                 <a:latin typeface="Roboto"/>
               </a:rPr>
-              <a:t>A credential in git is public the moment the repository is.</a:t>
+              <a:t>40,000 objects is not a legible map at any frame rate.</a:t>
             </a:r>
           </a:p>
         </p:txBody>
@@ -7355,7 +7355,7 @@
                 </a:solidFill>
                 <a:latin typeface="Roboto"/>
               </a:rPr>
-              <a:t>Credentials in environment variables only. Configuration is never printed as an object — one field at a time.</a:t>
+              <a:t>Responses thinned to 2,000; one layer at a time; positions interpolated between polls.</a:t>
             </a:r>
           </a:p>
         </p:txBody>
@@ -7442,7 +7442,7 @@
                 </a:solidFill>
                 <a:latin typeface="Saira Medium"/>
               </a:rPr>
-              <a:t>R4  Work serialises behind one person</a:t>
+              <a:t>R4  Free hosting proves insufficient</a:t>
             </a:r>
           </a:p>
         </p:txBody>
@@ -7520,7 +7520,7 @@
                 </a:solidFill>
                 <a:latin typeface="Roboto"/>
               </a:rPr>
-              <a:t>Five part-time students: if the layers queue, the schedule goes.</a:t>
+              <a:t>Both hosts are free tiers. There is no budget to scale into.</a:t>
             </a:r>
           </a:p>
         </p:txBody>
@@ -7559,7 +7559,7 @@
                 </a:solidFill>
                 <a:latin typeface="Roboto"/>
               </a:rPr>
-              <a:t>The shared data shape was fixed before any provider was written, so the three layers proceed in parallel.</a:t>
+              <a:t>One worker by design, everything answered from memory. Scaling is a bigger box, not more boxes.</a:t>
             </a:r>
           </a:p>
         </p:txBody>

--- a/docs/report/documents/Orbital-Presentation.pptx
+++ b/docs/report/documents/Orbital-Presentation.pptx
@@ -1125,7 +1125,7 @@
           <a:lstStyle/>
           <a:p>
             <a:r>
-              <a:t>R1 is the one to dwell on: the architecture was designed so that a feed disappearing costs one module, and when it happened that is exactly what it cost. The full register, including the schedule risk that was also realised, is section 4.6 of the report.</a:t>
+              <a:t>R1 is the one that actually happened: the architecture was designed so that losing a feed costs one module, and when OpenSky went it cost exactly that. R4 is the one with a ceiling, and be ready for the follow-up - scaling is vertical only, because a second worker would open a second AIS socket and the two stores would disagree. Past a bigger box the design has to change, and 4.6 says so. The full register of ten is section 4.6.</a:t>
             </a:r>
           </a:p>
         </p:txBody>
@@ -7442,7 +7442,7 @@
                 </a:solidFill>
                 <a:latin typeface="Saira Medium"/>
               </a:rPr>
-              <a:t>R4  Free hosting proves insufficient</a:t>
+              <a:t>R4  Traffic outgrows one backend</a:t>
             </a:r>
           </a:p>
         </p:txBody>
@@ -7520,7 +7520,7 @@
                 </a:solidFill>
                 <a:latin typeface="Roboto"/>
               </a:rPr>
-              <a:t>Both hosts are free tiers. There is no budget to scale into.</a:t>
+              <a:t>One worker serves every viewer, on a free tier, single-threaded.</a:t>
             </a:r>
           </a:p>
         </p:txBody>
@@ -7559,7 +7559,7 @@
                 </a:solidFill>
                 <a:latin typeface="Roboto"/>
               </a:rPr>
-              <a:t>One worker by design, everything answered from memory. Scaling is a bigger box, not more boxes.</a:t>
+              <a:t>Viewer count costs no upstream quota. Twenty-nine polls in thirty answer 304 without building a response.</a:t>
             </a:r>
           </a:p>
         </p:txBody>

--- a/docs/report/documents/Orbital-Presentation.pptx
+++ b/docs/report/documents/Orbital-Presentation.pptx
@@ -20,6 +20,7 @@
     <p:sldId id="266" r:id="rId20"/>
     <p:sldId id="267" r:id="rId21"/>
     <p:sldId id="268" r:id="rId22"/>
+    <p:sldId id="269" r:id="rId23"/>
     <p:sldId id="261" r:id="rId7"/>
   </p:sldIdLst>
   <p:sldSz cx="12192000" cy="6858000"/>
@@ -440,7 +441,7 @@
           <a:lstStyle/>
           <a:p>
             <a:r>
-              <a:t>The honest cost: Orbital cannot answer a question about last Tuesday. Entitlement windows are bounded by what is still in memory, not by a query.</a:t>
+              <a:t>Four languages. The one worth a sentence is GLSL — the shaders are written by hand rather than taken from a library, because the markers, the orbit shells and the day-night terminator all draw inside MapLibre's WebGL context and there is no component that does that. Everything else on this slide is a deliberate choice to not write something ourselves.</a:t>
             </a:r>
           </a:p>
         </p:txBody>
@@ -493,7 +494,7 @@
           <a:lstStyle/>
           <a:p>
             <a:r>
-              <a:t>Seven concrete providers, one abstraction. The API never holds a Provider, so there is no call path from a request to a socket.</a:t>
+              <a:t>The honest cost: Orbital cannot answer a question about last Tuesday. Entitlement windows are bounded by what is still in memory, not by a query.</a:t>
             </a:r>
           </a:p>
         </p:txBody>
@@ -507,6 +508,59 @@
 </file>
 
 <file path=ppt/notesSlides/notesSlide13.xml><?xml version="1.0" encoding="utf-8"?>
+<p:notes xmlns:a="http://schemas.openxmlformats.org/drawingml/2006/main" xmlns:p="http://schemas.openxmlformats.org/presentationml/2006/main" xmlns:r="http://schemas.openxmlformats.org/officeDocument/2006/relationships">
+  <p:cSld>
+    <p:spTree>
+      <p:nvGrpSpPr>
+        <p:cNvPr id="1" name=""/>
+        <p:cNvGrpSpPr/>
+        <p:nvPr/>
+      </p:nvGrpSpPr>
+      <p:grpSpPr>
+        <a:xfrm>
+          <a:off x="0" y="0"/>
+          <a:ext cx="0" cy="0"/>
+          <a:chOff x="0" y="0"/>
+          <a:chExt cx="0" cy="0"/>
+        </a:xfrm>
+      </p:grpSpPr>
+      <p:sp>
+        <p:nvSpPr>
+          <p:cNvPr id="2" name="Speaker notes"/>
+          <p:cNvSpPr txBox="1"/>
+          <p:nvPr/>
+        </p:nvSpPr>
+        <p:spPr>
+          <a:xfrm>
+            <a:off x="548640" y="548640"/>
+            <a:ext cx="5486400" cy="2926080"/>
+          </a:xfrm>
+          <a:prstGeom prst="rect">
+            <a:avLst/>
+          </a:prstGeom>
+          <a:noFill/>
+        </p:spPr>
+        <p:txBody>
+          <a:bodyPr wrap="square">
+            <a:spAutoFit/>
+          </a:bodyPr>
+          <a:lstStyle/>
+          <a:p>
+            <a:r>
+              <a:t>Seven concrete providers, one abstraction. The API never holds a Provider, so there is no call path from a request to a socket.</a:t>
+            </a:r>
+          </a:p>
+        </p:txBody>
+      </p:sp>
+    </p:spTree>
+  </p:cSld>
+  <p:clrMapOvr>
+    <a:masterClrMapping/>
+  </p:clrMapOvr>
+</p:notes>
+</file>
+
+<file path=ppt/notesSlides/notesSlide14.xml><?xml version="1.0" encoding="utf-8"?>
 <p:notes xmlns:a="http://schemas.openxmlformats.org/drawingml/2006/main" xmlns:p="http://schemas.openxmlformats.org/presentationml/2006/main" xmlns:r="http://schemas.openxmlformats.org/officeDocument/2006/relationships">
   <p:cSld>
     <p:spTree>
@@ -2028,7 +2082,7 @@
                 </a:solidFill>
                 <a:latin typeface="Saira Medium"/>
               </a:rPr>
-              <a:t>Two tables — and that is the design</a:t>
+              <a:t>What it is built with</a:t>
             </a:r>
           </a:p>
         </p:txBody>
@@ -2067,31 +2121,70 @@
                 </a:solidFill>
                 <a:latin typeface="Roboto"/>
               </a:rPr>
-              <a:t>A tracker looks like a system that needs a large database. Orbital deliberately has almost none.</a:t>
-            </a:r>
-          </a:p>
-        </p:txBody>
-      </p:sp>
-      <p:sp>
-        <p:nvSpPr>
-          <p:cNvPr id="5" name="Rounded Rectangle 4"/>
+              <a:t>Four languages, and a short list of libraries doing the work that would otherwise be ours.</a:t>
+            </a:r>
+          </a:p>
+        </p:txBody>
+      </p:sp>
+      <p:sp>
+        <p:nvSpPr>
+          <p:cNvPr id="5" name="TextBox 4"/>
+          <p:cNvSpPr txBox="1"/>
+          <p:nvPr/>
+        </p:nvSpPr>
+        <p:spPr>
+          <a:xfrm>
+            <a:off x="658368" y="1828800"/>
+            <a:ext cx="5120640" cy="274320"/>
+          </a:xfrm>
+          <a:prstGeom prst="rect">
+            <a:avLst/>
+          </a:prstGeom>
+          <a:noFill/>
+        </p:spPr>
+        <p:txBody>
+          <a:bodyPr wrap="square" lIns="0" rIns="0" tIns="0" bIns="0">
+            <a:spAutoFit/>
+          </a:bodyPr>
+          <a:lstStyle/>
+          <a:p>
+            <a:pPr algn="l">
+              <a:lnSpc>
+                <a:spcPct val="100000"/>
+              </a:lnSpc>
+            </a:pPr>
+            <a:r>
+              <a:rPr sz="1100" b="0">
+                <a:solidFill>
+                  <a:srgbClr val="FC8337"/>
+                </a:solidFill>
+                <a:latin typeface="Saira Medium"/>
+              </a:rPr>
+              <a:t>LANGUAGES</a:t>
+            </a:r>
+          </a:p>
+        </p:txBody>
+      </p:sp>
+      <p:sp>
+        <p:nvSpPr>
+          <p:cNvPr id="6" name="Rounded Rectangle 5"/>
           <p:cNvSpPr/>
           <p:nvPr/>
         </p:nvSpPr>
         <p:spPr>
           <a:xfrm>
-            <a:off x="4754678" y="1783080"/>
-            <a:ext cx="6309762" cy="4709160"/>
+            <a:off x="658368" y="2240280"/>
+            <a:ext cx="5120640" cy="960120"/>
           </a:xfrm>
           <a:prstGeom prst="roundRect">
             <a:avLst>
-              <a:gd name="adj" fmla="val 2000"/>
+              <a:gd name="adj" fmla="val 3000"/>
             </a:avLst>
           </a:prstGeom>
           <a:solidFill>
-            <a:srgbClr val="FFFFFF"/>
+            <a:srgbClr val="030303"/>
           </a:solidFill>
-          <a:ln w="12700">
+          <a:ln w="9525">
             <a:solidFill>
               <a:srgbClr val="FC8337"/>
             </a:solidFill>
@@ -2120,30 +2213,6 @@
           </a:p>
         </p:txBody>
       </p:sp>
-      <p:pic>
-        <p:nvPicPr>
-          <p:cNvPr id="6" name="Picture 5" descr="5-2-er-diagram.png"/>
-          <p:cNvPicPr>
-            <a:picLocks noChangeAspect="1"/>
-          </p:cNvPicPr>
-          <p:nvPr/>
-        </p:nvPicPr>
-        <p:blipFill>
-          <a:blip r:embed="rId3"/>
-          <a:stretch>
-            <a:fillRect/>
-          </a:stretch>
-        </p:blipFill>
-        <p:spPr>
-          <a:xfrm>
-            <a:off x="4864406" y="1892808"/>
-            <a:ext cx="6090306" cy="4489704"/>
-          </a:xfrm>
-          <a:prstGeom prst="rect">
-            <a:avLst/>
-          </a:prstGeom>
-        </p:spPr>
-      </p:pic>
       <p:sp>
         <p:nvSpPr>
           <p:cNvPr id="7" name="TextBox 6"/>
@@ -2152,8 +2221,8 @@
         </p:nvSpPr>
         <p:spPr>
           <a:xfrm>
-            <a:off x="658368" y="2057400"/>
-            <a:ext cx="3108960" cy="320040"/>
+            <a:off x="914400" y="2395728"/>
+            <a:ext cx="4572000" cy="256032"/>
           </a:xfrm>
           <a:prstGeom prst="rect">
             <a:avLst/>
@@ -2172,13 +2241,13 @@
               </a:lnSpc>
             </a:pPr>
             <a:r>
-              <a:rPr sz="1700" b="0">
+              <a:rPr sz="1500" b="0">
                 <a:solidFill>
                   <a:srgbClr val="FFFFFF"/>
                 </a:solidFill>
                 <a:latin typeface="Saira Medium"/>
               </a:rPr>
-              <a:t>Accounts and sessions</a:t>
+              <a:t>Python</a:t>
             </a:r>
           </a:p>
         </p:txBody>
@@ -2191,8 +2260,8 @@
         </p:nvSpPr>
         <p:spPr>
           <a:xfrm>
-            <a:off x="658368" y="2468880"/>
-            <a:ext cx="3108960" cy="1188720"/>
+            <a:off x="914400" y="2743200"/>
+            <a:ext cx="4608576" cy="384048"/>
           </a:xfrm>
           <a:prstGeom prst="rect">
             <a:avLst/>
@@ -2207,63 +2276,79 @@
           <a:p>
             <a:pPr algn="l">
               <a:lnSpc>
-                <a:spcPct val="125000"/>
-              </a:lnSpc>
-            </a:pPr>
-            <a:r>
-              <a:rPr sz="1200" b="0">
+                <a:spcPct val="118000"/>
+              </a:lnSpc>
+            </a:pPr>
+            <a:r>
+              <a:rPr sz="1050" b="0">
                 <a:solidFill>
                   <a:srgbClr val="E5E0DF"/>
                 </a:solidFill>
                 <a:latin typeface="Roboto"/>
               </a:rPr>
-              <a:t>The only state worth surviving a</a:t>
-            </a:r>
-          </a:p>
-          <a:p>
-            <a:pPr algn="l">
-              <a:lnSpc>
-                <a:spcPct val="125000"/>
-              </a:lnSpc>
-            </a:pPr>
-            <a:r>
-              <a:rPr sz="1200" b="0">
-                <a:solidFill>
-                  <a:srgbClr val="E5E0DF"/>
-                </a:solidFill>
-                <a:latin typeface="Roboto"/>
-              </a:rPr>
-              <a:t>restart. The raw session token is</a:t>
-            </a:r>
-          </a:p>
-          <a:p>
-            <a:pPr algn="l">
-              <a:lnSpc>
-                <a:spcPct val="125000"/>
-              </a:lnSpc>
-            </a:pPr>
-            <a:r>
-              <a:rPr sz="1200" b="0">
-                <a:solidFill>
-                  <a:srgbClr val="E5E0DF"/>
-                </a:solidFill>
-                <a:latin typeface="Roboto"/>
-              </a:rPr>
-              <a:t>returned once and never stored.</a:t>
-            </a:r>
-          </a:p>
-        </p:txBody>
-      </p:sp>
-      <p:sp>
-        <p:nvSpPr>
-          <p:cNvPr id="9" name="TextBox 8"/>
+              <a:t>The backend: ingestion, the REST API, accounts. Pydantic turns the data contract into something that runs.</a:t>
+            </a:r>
+          </a:p>
+        </p:txBody>
+      </p:sp>
+      <p:sp>
+        <p:nvSpPr>
+          <p:cNvPr id="9" name="Rounded Rectangle 8"/>
+          <p:cNvSpPr/>
+          <p:nvPr/>
+        </p:nvSpPr>
+        <p:spPr>
+          <a:xfrm>
+            <a:off x="658368" y="3310128"/>
+            <a:ext cx="5120640" cy="960120"/>
+          </a:xfrm>
+          <a:prstGeom prst="roundRect">
+            <a:avLst>
+              <a:gd name="adj" fmla="val 3000"/>
+            </a:avLst>
+          </a:prstGeom>
+          <a:solidFill>
+            <a:srgbClr val="030303"/>
+          </a:solidFill>
+          <a:ln w="9525">
+            <a:solidFill>
+              <a:srgbClr val="FC8337"/>
+            </a:solidFill>
+          </a:ln>
+          <a:effectLst/>
+        </p:spPr>
+        <p:style>
+          <a:lnRef idx="1">
+            <a:schemeClr val="accent1"/>
+          </a:lnRef>
+          <a:fillRef idx="3">
+            <a:schemeClr val="accent1"/>
+          </a:fillRef>
+          <a:effectRef idx="2">
+            <a:schemeClr val="accent1"/>
+          </a:effectRef>
+          <a:fontRef idx="minor">
+            <a:schemeClr val="lt1"/>
+          </a:fontRef>
+        </p:style>
+        <p:txBody>
+          <a:bodyPr rtlCol="0" anchor="ctr"/>
+          <a:lstStyle/>
+          <a:p>
+            <a:pPr algn="ctr"/>
+          </a:p>
+        </p:txBody>
+      </p:sp>
+      <p:sp>
+        <p:nvSpPr>
+          <p:cNvPr id="10" name="TextBox 9"/>
           <p:cNvSpPr txBox="1"/>
           <p:nvPr/>
         </p:nvSpPr>
         <p:spPr>
           <a:xfrm>
-            <a:off x="658368" y="3840480"/>
-            <a:ext cx="3108960" cy="320040"/>
+            <a:off x="914400" y="3465576"/>
+            <a:ext cx="4572000" cy="256032"/>
           </a:xfrm>
           <a:prstGeom prst="rect">
             <a:avLst/>
@@ -2282,27 +2367,27 @@
               </a:lnSpc>
             </a:pPr>
             <a:r>
-              <a:rPr sz="1700" b="0">
+              <a:rPr sz="1500" b="0">
                 <a:solidFill>
                   <a:srgbClr val="FFFFFF"/>
                 </a:solidFill>
                 <a:latin typeface="Saira Medium"/>
               </a:rPr>
-              <a:t>Everything else is memory</a:t>
-            </a:r>
-          </a:p>
-        </p:txBody>
-      </p:sp>
-      <p:sp>
-        <p:nvSpPr>
-          <p:cNvPr id="10" name="TextBox 9"/>
+              <a:t>TypeScript</a:t>
+            </a:r>
+          </a:p>
+        </p:txBody>
+      </p:sp>
+      <p:sp>
+        <p:nvSpPr>
+          <p:cNvPr id="11" name="TextBox 10"/>
           <p:cNvSpPr txBox="1"/>
           <p:nvPr/>
         </p:nvSpPr>
         <p:spPr>
           <a:xfrm>
-            <a:off x="658368" y="4251960"/>
-            <a:ext cx="3108960" cy="1188720"/>
+            <a:off x="914400" y="3813048"/>
+            <a:ext cx="4608576" cy="384048"/>
           </a:xfrm>
           <a:prstGeom prst="rect">
             <a:avLst/>
@@ -2317,49 +2402,902 @@
           <a:p>
             <a:pPr algn="l">
               <a:lnSpc>
-                <a:spcPct val="125000"/>
-              </a:lnSpc>
-            </a:pPr>
-            <a:r>
-              <a:rPr sz="1200" b="0">
+                <a:spcPct val="118000"/>
+              </a:lnSpc>
+            </a:pPr>
+            <a:r>
+              <a:rPr sz="1050" b="0">
                 <a:solidFill>
                   <a:srgbClr val="E5E0DF"/>
                 </a:solidFill>
                 <a:latin typeface="Roboto"/>
               </a:rPr>
-              <a:t>A poll replaces the snapshot.</a:t>
-            </a:r>
-          </a:p>
+              <a:t>The frontend: the map, the object layers, the interface. The same contract, enforced at compile time.</a:t>
+            </a:r>
+          </a:p>
+        </p:txBody>
+      </p:sp>
+      <p:sp>
+        <p:nvSpPr>
+          <p:cNvPr id="12" name="Rounded Rectangle 11"/>
+          <p:cNvSpPr/>
+          <p:nvPr/>
+        </p:nvSpPr>
+        <p:spPr>
+          <a:xfrm>
+            <a:off x="658368" y="4379976"/>
+            <a:ext cx="5120640" cy="960120"/>
+          </a:xfrm>
+          <a:prstGeom prst="roundRect">
+            <a:avLst>
+              <a:gd name="adj" fmla="val 3000"/>
+            </a:avLst>
+          </a:prstGeom>
+          <a:solidFill>
+            <a:srgbClr val="030303"/>
+          </a:solidFill>
+          <a:ln w="9525">
+            <a:solidFill>
+              <a:srgbClr val="FC8337"/>
+            </a:solidFill>
+          </a:ln>
+          <a:effectLst/>
+        </p:spPr>
+        <p:style>
+          <a:lnRef idx="1">
+            <a:schemeClr val="accent1"/>
+          </a:lnRef>
+          <a:fillRef idx="3">
+            <a:schemeClr val="accent1"/>
+          </a:fillRef>
+          <a:effectRef idx="2">
+            <a:schemeClr val="accent1"/>
+          </a:effectRef>
+          <a:fontRef idx="minor">
+            <a:schemeClr val="lt1"/>
+          </a:fontRef>
+        </p:style>
+        <p:txBody>
+          <a:bodyPr rtlCol="0" anchor="ctr"/>
+          <a:lstStyle/>
+          <a:p>
+            <a:pPr algn="ctr"/>
+          </a:p>
+        </p:txBody>
+      </p:sp>
+      <p:sp>
+        <p:nvSpPr>
+          <p:cNvPr id="13" name="TextBox 12"/>
+          <p:cNvSpPr txBox="1"/>
+          <p:nvPr/>
+        </p:nvSpPr>
+        <p:spPr>
+          <a:xfrm>
+            <a:off x="914400" y="4535424"/>
+            <a:ext cx="4572000" cy="256032"/>
+          </a:xfrm>
+          <a:prstGeom prst="rect">
+            <a:avLst/>
+          </a:prstGeom>
+          <a:noFill/>
+        </p:spPr>
+        <p:txBody>
+          <a:bodyPr wrap="square" lIns="0" rIns="0" tIns="0" bIns="0">
+            <a:spAutoFit/>
+          </a:bodyPr>
+          <a:lstStyle/>
           <a:p>
             <a:pPr algn="l">
               <a:lnSpc>
-                <a:spcPct val="125000"/>
-              </a:lnSpc>
-            </a:pPr>
-            <a:r>
-              <a:rPr sz="1200" b="0">
+                <a:spcPct val="100000"/>
+              </a:lnSpc>
+            </a:pPr>
+            <a:r>
+              <a:rPr sz="1500" b="0">
+                <a:solidFill>
+                  <a:srgbClr val="FFFFFF"/>
+                </a:solidFill>
+                <a:latin typeface="Saira Medium"/>
+              </a:rPr>
+              <a:t>GLSL</a:t>
+            </a:r>
+          </a:p>
+        </p:txBody>
+      </p:sp>
+      <p:sp>
+        <p:nvSpPr>
+          <p:cNvPr id="14" name="TextBox 13"/>
+          <p:cNvSpPr txBox="1"/>
+          <p:nvPr/>
+        </p:nvSpPr>
+        <p:spPr>
+          <a:xfrm>
+            <a:off x="914400" y="4882896"/>
+            <a:ext cx="4608576" cy="384048"/>
+          </a:xfrm>
+          <a:prstGeom prst="rect">
+            <a:avLst/>
+          </a:prstGeom>
+          <a:noFill/>
+        </p:spPr>
+        <p:txBody>
+          <a:bodyPr wrap="square" lIns="0" rIns="0" tIns="0" bIns="0">
+            <a:spAutoFit/>
+          </a:bodyPr>
+          <a:lstStyle/>
+          <a:p>
+            <a:pPr algn="l">
+              <a:lnSpc>
+                <a:spcPct val="118000"/>
+              </a:lnSpc>
+            </a:pPr>
+            <a:r>
+              <a:rPr sz="1050" b="0">
                 <a:solidFill>
                   <a:srgbClr val="E5E0DF"/>
                 </a:solidFill>
                 <a:latin typeface="Roboto"/>
               </a:rPr>
-              <a:t>No schema migration for the thing</a:t>
-            </a:r>
-          </a:p>
+              <a:t>Shaders written by hand for the marker, orbit-shell and terminator layers, inside MapLibre's WebGL context.</a:t>
+            </a:r>
+          </a:p>
+        </p:txBody>
+      </p:sp>
+      <p:sp>
+        <p:nvSpPr>
+          <p:cNvPr id="15" name="Rounded Rectangle 14"/>
+          <p:cNvSpPr/>
+          <p:nvPr/>
+        </p:nvSpPr>
+        <p:spPr>
+          <a:xfrm>
+            <a:off x="658368" y="5449824"/>
+            <a:ext cx="5120640" cy="960120"/>
+          </a:xfrm>
+          <a:prstGeom prst="roundRect">
+            <a:avLst>
+              <a:gd name="adj" fmla="val 3000"/>
+            </a:avLst>
+          </a:prstGeom>
+          <a:solidFill>
+            <a:srgbClr val="030303"/>
+          </a:solidFill>
+          <a:ln w="9525">
+            <a:solidFill>
+              <a:srgbClr val="FC8337"/>
+            </a:solidFill>
+          </a:ln>
+          <a:effectLst/>
+        </p:spPr>
+        <p:style>
+          <a:lnRef idx="1">
+            <a:schemeClr val="accent1"/>
+          </a:lnRef>
+          <a:fillRef idx="3">
+            <a:schemeClr val="accent1"/>
+          </a:fillRef>
+          <a:effectRef idx="2">
+            <a:schemeClr val="accent1"/>
+          </a:effectRef>
+          <a:fontRef idx="minor">
+            <a:schemeClr val="lt1"/>
+          </a:fontRef>
+        </p:style>
+        <p:txBody>
+          <a:bodyPr rtlCol="0" anchor="ctr"/>
+          <a:lstStyle/>
+          <a:p>
+            <a:pPr algn="ctr"/>
+          </a:p>
+        </p:txBody>
+      </p:sp>
+      <p:sp>
+        <p:nvSpPr>
+          <p:cNvPr id="16" name="TextBox 15"/>
+          <p:cNvSpPr txBox="1"/>
+          <p:nvPr/>
+        </p:nvSpPr>
+        <p:spPr>
+          <a:xfrm>
+            <a:off x="914400" y="5605272"/>
+            <a:ext cx="4572000" cy="256032"/>
+          </a:xfrm>
+          <a:prstGeom prst="rect">
+            <a:avLst/>
+          </a:prstGeom>
+          <a:noFill/>
+        </p:spPr>
+        <p:txBody>
+          <a:bodyPr wrap="square" lIns="0" rIns="0" tIns="0" bIns="0">
+            <a:spAutoFit/>
+          </a:bodyPr>
+          <a:lstStyle/>
           <a:p>
             <a:pPr algn="l">
               <a:lnSpc>
-                <a:spcPct val="125000"/>
-              </a:lnSpc>
-            </a:pPr>
-            <a:r>
-              <a:rPr sz="1200" b="0">
+                <a:spcPct val="100000"/>
+              </a:lnSpc>
+            </a:pPr>
+            <a:r>
+              <a:rPr sz="1500" b="0">
+                <a:solidFill>
+                  <a:srgbClr val="FFFFFF"/>
+                </a:solidFill>
+                <a:latin typeface="Saira Medium"/>
+              </a:rPr>
+              <a:t>SQL</a:t>
+            </a:r>
+          </a:p>
+        </p:txBody>
+      </p:sp>
+      <p:sp>
+        <p:nvSpPr>
+          <p:cNvPr id="17" name="TextBox 16"/>
+          <p:cNvSpPr txBox="1"/>
+          <p:nvPr/>
+        </p:nvSpPr>
+        <p:spPr>
+          <a:xfrm>
+            <a:off x="914400" y="5952744"/>
+            <a:ext cx="4608576" cy="384048"/>
+          </a:xfrm>
+          <a:prstGeom prst="rect">
+            <a:avLst/>
+          </a:prstGeom>
+          <a:noFill/>
+        </p:spPr>
+        <p:txBody>
+          <a:bodyPr wrap="square" lIns="0" rIns="0" tIns="0" bIns="0">
+            <a:spAutoFit/>
+          </a:bodyPr>
+          <a:lstStyle/>
+          <a:p>
+            <a:pPr algn="l">
+              <a:lnSpc>
+                <a:spcPct val="118000"/>
+              </a:lnSpc>
+            </a:pPr>
+            <a:r>
+              <a:rPr sz="1050" b="0">
                 <a:solidFill>
                   <a:srgbClr val="E5E0DF"/>
                 </a:solidFill>
                 <a:latin typeface="Roboto"/>
               </a:rPr>
-              <a:t>that changes most: a feed's shape.</a:t>
+              <a:t>Two tables — accounts and sessions. The only state that survives a restart.</a:t>
+            </a:r>
+          </a:p>
+        </p:txBody>
+      </p:sp>
+      <p:sp>
+        <p:nvSpPr>
+          <p:cNvPr id="18" name="TextBox 17"/>
+          <p:cNvSpPr txBox="1"/>
+          <p:nvPr/>
+        </p:nvSpPr>
+        <p:spPr>
+          <a:xfrm>
+            <a:off x="6355080" y="1828800"/>
+            <a:ext cx="5120640" cy="274320"/>
+          </a:xfrm>
+          <a:prstGeom prst="rect">
+            <a:avLst/>
+          </a:prstGeom>
+          <a:noFill/>
+        </p:spPr>
+        <p:txBody>
+          <a:bodyPr wrap="square" lIns="0" rIns="0" tIns="0" bIns="0">
+            <a:spAutoFit/>
+          </a:bodyPr>
+          <a:lstStyle/>
+          <a:p>
+            <a:pPr algn="l">
+              <a:lnSpc>
+                <a:spcPct val="100000"/>
+              </a:lnSpc>
+            </a:pPr>
+            <a:r>
+              <a:rPr sz="1100" b="0">
+                <a:solidFill>
+                  <a:srgbClr val="FC8337"/>
+                </a:solidFill>
+                <a:latin typeface="Saira Medium"/>
+              </a:rPr>
+              <a:t>AND THE LIBRARIES</a:t>
+            </a:r>
+          </a:p>
+        </p:txBody>
+      </p:sp>
+      <p:sp>
+        <p:nvSpPr>
+          <p:cNvPr id="19" name="Rounded Rectangle 18"/>
+          <p:cNvSpPr/>
+          <p:nvPr/>
+        </p:nvSpPr>
+        <p:spPr>
+          <a:xfrm>
+            <a:off x="6355080" y="2240280"/>
+            <a:ext cx="5175504" cy="4224528"/>
+          </a:xfrm>
+          <a:prstGeom prst="roundRect">
+            <a:avLst>
+              <a:gd name="adj" fmla="val 3000"/>
+            </a:avLst>
+          </a:prstGeom>
+          <a:solidFill>
+            <a:srgbClr val="030303"/>
+          </a:solidFill>
+          <a:ln w="9525">
+            <a:solidFill>
+              <a:srgbClr val="FC8337"/>
+            </a:solidFill>
+          </a:ln>
+          <a:effectLst/>
+        </p:spPr>
+        <p:style>
+          <a:lnRef idx="1">
+            <a:schemeClr val="accent1"/>
+          </a:lnRef>
+          <a:fillRef idx="3">
+            <a:schemeClr val="accent1"/>
+          </a:fillRef>
+          <a:effectRef idx="2">
+            <a:schemeClr val="accent1"/>
+          </a:effectRef>
+          <a:fontRef idx="minor">
+            <a:schemeClr val="lt1"/>
+          </a:fontRef>
+        </p:style>
+        <p:txBody>
+          <a:bodyPr rtlCol="0" anchor="ctr"/>
+          <a:lstStyle/>
+          <a:p>
+            <a:pPr algn="ctr"/>
+          </a:p>
+        </p:txBody>
+      </p:sp>
+      <p:sp>
+        <p:nvSpPr>
+          <p:cNvPr id="20" name="TextBox 19"/>
+          <p:cNvSpPr txBox="1"/>
+          <p:nvPr/>
+        </p:nvSpPr>
+        <p:spPr>
+          <a:xfrm>
+            <a:off x="6629400" y="2468880"/>
+            <a:ext cx="1371600" cy="237744"/>
+          </a:xfrm>
+          <a:prstGeom prst="rect">
+            <a:avLst/>
+          </a:prstGeom>
+          <a:noFill/>
+        </p:spPr>
+        <p:txBody>
+          <a:bodyPr wrap="square" lIns="0" rIns="0" tIns="0" bIns="0">
+            <a:spAutoFit/>
+          </a:bodyPr>
+          <a:lstStyle/>
+          <a:p>
+            <a:pPr algn="l">
+              <a:lnSpc>
+                <a:spcPct val="100000"/>
+              </a:lnSpc>
+            </a:pPr>
+            <a:r>
+              <a:rPr sz="1050" b="0">
+                <a:solidFill>
+                  <a:srgbClr val="FC8337"/>
+                </a:solidFill>
+                <a:latin typeface="Saira Medium"/>
+              </a:rPr>
+              <a:t>Map</a:t>
+            </a:r>
+          </a:p>
+        </p:txBody>
+      </p:sp>
+      <p:sp>
+        <p:nvSpPr>
+          <p:cNvPr id="21" name="TextBox 20"/>
+          <p:cNvSpPr txBox="1"/>
+          <p:nvPr/>
+        </p:nvSpPr>
+        <p:spPr>
+          <a:xfrm>
+            <a:off x="8001000" y="2468880"/>
+            <a:ext cx="3383280" cy="237744"/>
+          </a:xfrm>
+          <a:prstGeom prst="rect">
+            <a:avLst/>
+          </a:prstGeom>
+          <a:noFill/>
+        </p:spPr>
+        <p:txBody>
+          <a:bodyPr wrap="square" lIns="0" rIns="0" tIns="0" bIns="0">
+            <a:spAutoFit/>
+          </a:bodyPr>
+          <a:lstStyle/>
+          <a:p>
+            <a:pPr algn="l">
+              <a:lnSpc>
+                <a:spcPct val="100000"/>
+              </a:lnSpc>
+            </a:pPr>
+            <a:r>
+              <a:rPr sz="1150" b="0">
+                <a:solidFill>
+                  <a:srgbClr val="FFFFFF"/>
+                </a:solidFill>
+                <a:latin typeface="Saira Medium"/>
+              </a:rPr>
+              <a:t>MapLibre GL JS  ·  three.js</a:t>
+            </a:r>
+          </a:p>
+        </p:txBody>
+      </p:sp>
+      <p:sp>
+        <p:nvSpPr>
+          <p:cNvPr id="22" name="TextBox 21"/>
+          <p:cNvSpPr txBox="1"/>
+          <p:nvPr/>
+        </p:nvSpPr>
+        <p:spPr>
+          <a:xfrm>
+            <a:off x="8001000" y="2779776"/>
+            <a:ext cx="3383280" cy="512064"/>
+          </a:xfrm>
+          <a:prstGeom prst="rect">
+            <a:avLst/>
+          </a:prstGeom>
+          <a:noFill/>
+        </p:spPr>
+        <p:txBody>
+          <a:bodyPr wrap="square" lIns="0" rIns="0" tIns="0" bIns="0">
+            <a:spAutoFit/>
+          </a:bodyPr>
+          <a:lstStyle/>
+          <a:p>
+            <a:pPr algn="l">
+              <a:lnSpc>
+                <a:spcPct val="120000"/>
+              </a:lnSpc>
+            </a:pPr>
+            <a:r>
+              <a:rPr sz="980" b="0">
+                <a:solidFill>
+                  <a:srgbClr val="E5E0DF"/>
+                </a:solidFill>
+                <a:latin typeface="Roboto"/>
+              </a:rPr>
+              <a:t>One view from globe to street level, and the selected aircraft drawn as a 3D model inside MapLibre's own context.</a:t>
+            </a:r>
+          </a:p>
+        </p:txBody>
+      </p:sp>
+      <p:sp>
+        <p:nvSpPr>
+          <p:cNvPr id="23" name="TextBox 22"/>
+          <p:cNvSpPr txBox="1"/>
+          <p:nvPr/>
+        </p:nvSpPr>
+        <p:spPr>
+          <a:xfrm>
+            <a:off x="6629400" y="3401568"/>
+            <a:ext cx="1371600" cy="237744"/>
+          </a:xfrm>
+          <a:prstGeom prst="rect">
+            <a:avLst/>
+          </a:prstGeom>
+          <a:noFill/>
+        </p:spPr>
+        <p:txBody>
+          <a:bodyPr wrap="square" lIns="0" rIns="0" tIns="0" bIns="0">
+            <a:spAutoFit/>
+          </a:bodyPr>
+          <a:lstStyle/>
+          <a:p>
+            <a:pPr algn="l">
+              <a:lnSpc>
+                <a:spcPct val="100000"/>
+              </a:lnSpc>
+            </a:pPr>
+            <a:r>
+              <a:rPr sz="1050" b="0">
+                <a:solidFill>
+                  <a:srgbClr val="FC8337"/>
+                </a:solidFill>
+                <a:latin typeface="Saira Medium"/>
+              </a:rPr>
+              <a:t>Frontend</a:t>
+            </a:r>
+          </a:p>
+        </p:txBody>
+      </p:sp>
+      <p:sp>
+        <p:nvSpPr>
+          <p:cNvPr id="24" name="TextBox 23"/>
+          <p:cNvSpPr txBox="1"/>
+          <p:nvPr/>
+        </p:nvSpPr>
+        <p:spPr>
+          <a:xfrm>
+            <a:off x="8001000" y="3401568"/>
+            <a:ext cx="3383280" cy="237744"/>
+          </a:xfrm>
+          <a:prstGeom prst="rect">
+            <a:avLst/>
+          </a:prstGeom>
+          <a:noFill/>
+        </p:spPr>
+        <p:txBody>
+          <a:bodyPr wrap="square" lIns="0" rIns="0" tIns="0" bIns="0">
+            <a:spAutoFit/>
+          </a:bodyPr>
+          <a:lstStyle/>
+          <a:p>
+            <a:pPr algn="l">
+              <a:lnSpc>
+                <a:spcPct val="100000"/>
+              </a:lnSpc>
+            </a:pPr>
+            <a:r>
+              <a:rPr sz="1150" b="0">
+                <a:solidFill>
+                  <a:srgbClr val="FFFFFF"/>
+                </a:solidFill>
+                <a:latin typeface="Saira Medium"/>
+              </a:rPr>
+              <a:t>React  ·  Vite</a:t>
+            </a:r>
+          </a:p>
+        </p:txBody>
+      </p:sp>
+      <p:sp>
+        <p:nvSpPr>
+          <p:cNvPr id="25" name="TextBox 24"/>
+          <p:cNvSpPr txBox="1"/>
+          <p:nvPr/>
+        </p:nvSpPr>
+        <p:spPr>
+          <a:xfrm>
+            <a:off x="6629400" y="3822192"/>
+            <a:ext cx="1371600" cy="237744"/>
+          </a:xfrm>
+          <a:prstGeom prst="rect">
+            <a:avLst/>
+          </a:prstGeom>
+          <a:noFill/>
+        </p:spPr>
+        <p:txBody>
+          <a:bodyPr wrap="square" lIns="0" rIns="0" tIns="0" bIns="0">
+            <a:spAutoFit/>
+          </a:bodyPr>
+          <a:lstStyle/>
+          <a:p>
+            <a:pPr algn="l">
+              <a:lnSpc>
+                <a:spcPct val="100000"/>
+              </a:lnSpc>
+            </a:pPr>
+            <a:r>
+              <a:rPr sz="1050" b="0">
+                <a:solidFill>
+                  <a:srgbClr val="FC8337"/>
+                </a:solidFill>
+                <a:latin typeface="Saira Medium"/>
+              </a:rPr>
+              <a:t>Backend</a:t>
+            </a:r>
+          </a:p>
+        </p:txBody>
+      </p:sp>
+      <p:sp>
+        <p:nvSpPr>
+          <p:cNvPr id="26" name="TextBox 25"/>
+          <p:cNvSpPr txBox="1"/>
+          <p:nvPr/>
+        </p:nvSpPr>
+        <p:spPr>
+          <a:xfrm>
+            <a:off x="8001000" y="3822192"/>
+            <a:ext cx="3383280" cy="237744"/>
+          </a:xfrm>
+          <a:prstGeom prst="rect">
+            <a:avLst/>
+          </a:prstGeom>
+          <a:noFill/>
+        </p:spPr>
+        <p:txBody>
+          <a:bodyPr wrap="square" lIns="0" rIns="0" tIns="0" bIns="0">
+            <a:spAutoFit/>
+          </a:bodyPr>
+          <a:lstStyle/>
+          <a:p>
+            <a:pPr algn="l">
+              <a:lnSpc>
+                <a:spcPct val="100000"/>
+              </a:lnSpc>
+            </a:pPr>
+            <a:r>
+              <a:rPr sz="1150" b="0">
+                <a:solidFill>
+                  <a:srgbClr val="FFFFFF"/>
+                </a:solidFill>
+                <a:latin typeface="Saira Medium"/>
+              </a:rPr>
+              <a:t>FastAPI  ·  httpx  ·  websockets</a:t>
+            </a:r>
+          </a:p>
+        </p:txBody>
+      </p:sp>
+      <p:sp>
+        <p:nvSpPr>
+          <p:cNvPr id="27" name="TextBox 26"/>
+          <p:cNvSpPr txBox="1"/>
+          <p:nvPr/>
+        </p:nvSpPr>
+        <p:spPr>
+          <a:xfrm>
+            <a:off x="8001000" y="4133088"/>
+            <a:ext cx="3383280" cy="512064"/>
+          </a:xfrm>
+          <a:prstGeom prst="rect">
+            <a:avLst/>
+          </a:prstGeom>
+          <a:noFill/>
+        </p:spPr>
+        <p:txBody>
+          <a:bodyPr wrap="square" lIns="0" rIns="0" tIns="0" bIns="0">
+            <a:spAutoFit/>
+          </a:bodyPr>
+          <a:lstStyle/>
+          <a:p>
+            <a:pPr algn="l">
+              <a:lnSpc>
+                <a:spcPct val="120000"/>
+              </a:lnSpc>
+            </a:pPr>
+            <a:r>
+              <a:rPr sz="980" b="0">
+                <a:solidFill>
+                  <a:srgbClr val="E5E0DF"/>
+                </a:solidFill>
+                <a:latin typeface="Roboto"/>
+              </a:rPr>
+              <a:t>Async throughout: polling never blocks a request, and the AIS stream pushes rather than being asked.</a:t>
+            </a:r>
+          </a:p>
+        </p:txBody>
+      </p:sp>
+      <p:sp>
+        <p:nvSpPr>
+          <p:cNvPr id="28" name="TextBox 27"/>
+          <p:cNvSpPr txBox="1"/>
+          <p:nvPr/>
+        </p:nvSpPr>
+        <p:spPr>
+          <a:xfrm>
+            <a:off x="6629400" y="4754880"/>
+            <a:ext cx="1371600" cy="237744"/>
+          </a:xfrm>
+          <a:prstGeom prst="rect">
+            <a:avLst/>
+          </a:prstGeom>
+          <a:noFill/>
+        </p:spPr>
+        <p:txBody>
+          <a:bodyPr wrap="square" lIns="0" rIns="0" tIns="0" bIns="0">
+            <a:spAutoFit/>
+          </a:bodyPr>
+          <a:lstStyle/>
+          <a:p>
+            <a:pPr algn="l">
+              <a:lnSpc>
+                <a:spcPct val="100000"/>
+              </a:lnSpc>
+            </a:pPr>
+            <a:r>
+              <a:rPr sz="1050" b="0">
+                <a:solidFill>
+                  <a:srgbClr val="FC8337"/>
+                </a:solidFill>
+                <a:latin typeface="Saira Medium"/>
+              </a:rPr>
+              <a:t>Orbits</a:t>
+            </a:r>
+          </a:p>
+        </p:txBody>
+      </p:sp>
+      <p:sp>
+        <p:nvSpPr>
+          <p:cNvPr id="29" name="TextBox 28"/>
+          <p:cNvSpPr txBox="1"/>
+          <p:nvPr/>
+        </p:nvSpPr>
+        <p:spPr>
+          <a:xfrm>
+            <a:off x="8001000" y="4754880"/>
+            <a:ext cx="3383280" cy="237744"/>
+          </a:xfrm>
+          <a:prstGeom prst="rect">
+            <a:avLst/>
+          </a:prstGeom>
+          <a:noFill/>
+        </p:spPr>
+        <p:txBody>
+          <a:bodyPr wrap="square" lIns="0" rIns="0" tIns="0" bIns="0">
+            <a:spAutoFit/>
+          </a:bodyPr>
+          <a:lstStyle/>
+          <a:p>
+            <a:pPr algn="l">
+              <a:lnSpc>
+                <a:spcPct val="100000"/>
+              </a:lnSpc>
+            </a:pPr>
+            <a:r>
+              <a:rPr sz="1150" b="0">
+                <a:solidFill>
+                  <a:srgbClr val="FFFFFF"/>
+                </a:solidFill>
+                <a:latin typeface="Saira Medium"/>
+              </a:rPr>
+              <a:t>sgp4</a:t>
+            </a:r>
+          </a:p>
+        </p:txBody>
+      </p:sp>
+      <p:sp>
+        <p:nvSpPr>
+          <p:cNvPr id="30" name="TextBox 29"/>
+          <p:cNvSpPr txBox="1"/>
+          <p:nvPr/>
+        </p:nvSpPr>
+        <p:spPr>
+          <a:xfrm>
+            <a:off x="8001000" y="5065776"/>
+            <a:ext cx="3383280" cy="512064"/>
+          </a:xfrm>
+          <a:prstGeom prst="rect">
+            <a:avLst/>
+          </a:prstGeom>
+          <a:noFill/>
+        </p:spPr>
+        <p:txBody>
+          <a:bodyPr wrap="square" lIns="0" rIns="0" tIns="0" bIns="0">
+            <a:spAutoFit/>
+          </a:bodyPr>
+          <a:lstStyle/>
+          <a:p>
+            <a:pPr algn="l">
+              <a:lnSpc>
+                <a:spcPct val="120000"/>
+              </a:lnSpc>
+            </a:pPr>
+            <a:r>
+              <a:rPr sz="980" b="0">
+                <a:solidFill>
+                  <a:srgbClr val="E5E0DF"/>
+                </a:solidFill>
+                <a:latin typeface="Roboto"/>
+              </a:rPr>
+              <a:t>The standard propagator — satellite positions are computed, not fetched.</a:t>
+            </a:r>
+          </a:p>
+        </p:txBody>
+      </p:sp>
+      <p:sp>
+        <p:nvSpPr>
+          <p:cNvPr id="31" name="TextBox 30"/>
+          <p:cNvSpPr txBox="1"/>
+          <p:nvPr/>
+        </p:nvSpPr>
+        <p:spPr>
+          <a:xfrm>
+            <a:off x="6629400" y="5687568"/>
+            <a:ext cx="1371600" cy="237744"/>
+          </a:xfrm>
+          <a:prstGeom prst="rect">
+            <a:avLst/>
+          </a:prstGeom>
+          <a:noFill/>
+        </p:spPr>
+        <p:txBody>
+          <a:bodyPr wrap="square" lIns="0" rIns="0" tIns="0" bIns="0">
+            <a:spAutoFit/>
+          </a:bodyPr>
+          <a:lstStyle/>
+          <a:p>
+            <a:pPr algn="l">
+              <a:lnSpc>
+                <a:spcPct val="100000"/>
+              </a:lnSpc>
+            </a:pPr>
+            <a:r>
+              <a:rPr sz="1050" b="0">
+                <a:solidFill>
+                  <a:srgbClr val="FC8337"/>
+                </a:solidFill>
+                <a:latin typeface="Saira Medium"/>
+              </a:rPr>
+              <a:t>Tests</a:t>
+            </a:r>
+          </a:p>
+        </p:txBody>
+      </p:sp>
+      <p:sp>
+        <p:nvSpPr>
+          <p:cNvPr id="32" name="TextBox 31"/>
+          <p:cNvSpPr txBox="1"/>
+          <p:nvPr/>
+        </p:nvSpPr>
+        <p:spPr>
+          <a:xfrm>
+            <a:off x="8001000" y="5687568"/>
+            <a:ext cx="3383280" cy="237744"/>
+          </a:xfrm>
+          <a:prstGeom prst="rect">
+            <a:avLst/>
+          </a:prstGeom>
+          <a:noFill/>
+        </p:spPr>
+        <p:txBody>
+          <a:bodyPr wrap="square" lIns="0" rIns="0" tIns="0" bIns="0">
+            <a:spAutoFit/>
+          </a:bodyPr>
+          <a:lstStyle/>
+          <a:p>
+            <a:pPr algn="l">
+              <a:lnSpc>
+                <a:spcPct val="100000"/>
+              </a:lnSpc>
+            </a:pPr>
+            <a:r>
+              <a:rPr sz="1150" b="0">
+                <a:solidFill>
+                  <a:srgbClr val="FFFFFF"/>
+                </a:solidFill>
+                <a:latin typeface="Saira Medium"/>
+              </a:rPr>
+              <a:t>pytest  ·  Vitest</a:t>
+            </a:r>
+          </a:p>
+        </p:txBody>
+      </p:sp>
+      <p:sp>
+        <p:nvSpPr>
+          <p:cNvPr id="33" name="TextBox 32"/>
+          <p:cNvSpPr txBox="1"/>
+          <p:nvPr/>
+        </p:nvSpPr>
+        <p:spPr>
+          <a:xfrm>
+            <a:off x="8001000" y="5998464"/>
+            <a:ext cx="3383280" cy="512064"/>
+          </a:xfrm>
+          <a:prstGeom prst="rect">
+            <a:avLst/>
+          </a:prstGeom>
+          <a:noFill/>
+        </p:spPr>
+        <p:txBody>
+          <a:bodyPr wrap="square" lIns="0" rIns="0" tIns="0" bIns="0">
+            <a:spAutoFit/>
+          </a:bodyPr>
+          <a:lstStyle/>
+          <a:p>
+            <a:pPr algn="l">
+              <a:lnSpc>
+                <a:spcPct val="120000"/>
+              </a:lnSpc>
+            </a:pPr>
+            <a:r>
+              <a:rPr sz="980" b="0">
+                <a:solidFill>
+                  <a:srgbClr val="E5E0DF"/>
+                </a:solidFill>
+                <a:latin typeface="Roboto"/>
+              </a:rPr>
+              <a:t>Both run offline, against fixtures.</a:t>
             </a:r>
           </a:p>
         </p:txBody>
@@ -2440,7 +3378,7 @@
                 </a:solidFill>
                 <a:latin typeface="Saira Medium"/>
               </a:rPr>
-              <a:t>Why a second feed cost one file</a:t>
+              <a:t>Two tables — and that is the design</a:t>
             </a:r>
           </a:p>
         </p:txBody>
@@ -2479,7 +3417,7 @@
                 </a:solidFill>
                 <a:latin typeface="Roboto"/>
               </a:rPr>
-              <a:t>UnionProvider inherits Provider and holds two of them. A caller cannot tell a pair of feeds from a single feed — which is why losing a primary source changed nothing above ingestion.</a:t>
+              <a:t>A tracker looks like a system that needs a large database. Orbital deliberately has almost none.</a:t>
             </a:r>
           </a:p>
         </p:txBody>
@@ -2492,8 +3430,8 @@
         </p:nvSpPr>
         <p:spPr>
           <a:xfrm>
-            <a:off x="2445137" y="1783080"/>
-            <a:ext cx="7271244" cy="4754880"/>
+            <a:off x="4754678" y="1783080"/>
+            <a:ext cx="6309762" cy="4709160"/>
           </a:xfrm>
           <a:prstGeom prst="roundRect">
             <a:avLst>
@@ -2534,6 +3472,418 @@
       </p:sp>
       <p:pic>
         <p:nvPicPr>
+          <p:cNvPr id="6" name="Picture 5" descr="5-2-er-diagram.png"/>
+          <p:cNvPicPr>
+            <a:picLocks noChangeAspect="1"/>
+          </p:cNvPicPr>
+          <p:nvPr/>
+        </p:nvPicPr>
+        <p:blipFill>
+          <a:blip r:embed="rId3"/>
+          <a:stretch>
+            <a:fillRect/>
+          </a:stretch>
+        </p:blipFill>
+        <p:spPr>
+          <a:xfrm>
+            <a:off x="4864406" y="1892808"/>
+            <a:ext cx="6090306" cy="4489704"/>
+          </a:xfrm>
+          <a:prstGeom prst="rect">
+            <a:avLst/>
+          </a:prstGeom>
+        </p:spPr>
+      </p:pic>
+      <p:sp>
+        <p:nvSpPr>
+          <p:cNvPr id="7" name="TextBox 6"/>
+          <p:cNvSpPr txBox="1"/>
+          <p:nvPr/>
+        </p:nvSpPr>
+        <p:spPr>
+          <a:xfrm>
+            <a:off x="658368" y="2057400"/>
+            <a:ext cx="3108960" cy="320040"/>
+          </a:xfrm>
+          <a:prstGeom prst="rect">
+            <a:avLst/>
+          </a:prstGeom>
+          <a:noFill/>
+        </p:spPr>
+        <p:txBody>
+          <a:bodyPr wrap="square" lIns="0" rIns="0" tIns="0" bIns="0">
+            <a:spAutoFit/>
+          </a:bodyPr>
+          <a:lstStyle/>
+          <a:p>
+            <a:pPr algn="l">
+              <a:lnSpc>
+                <a:spcPct val="100000"/>
+              </a:lnSpc>
+            </a:pPr>
+            <a:r>
+              <a:rPr sz="1700" b="0">
+                <a:solidFill>
+                  <a:srgbClr val="FFFFFF"/>
+                </a:solidFill>
+                <a:latin typeface="Saira Medium"/>
+              </a:rPr>
+              <a:t>Accounts and sessions</a:t>
+            </a:r>
+          </a:p>
+        </p:txBody>
+      </p:sp>
+      <p:sp>
+        <p:nvSpPr>
+          <p:cNvPr id="8" name="TextBox 7"/>
+          <p:cNvSpPr txBox="1"/>
+          <p:nvPr/>
+        </p:nvSpPr>
+        <p:spPr>
+          <a:xfrm>
+            <a:off x="658368" y="2468880"/>
+            <a:ext cx="3108960" cy="1188720"/>
+          </a:xfrm>
+          <a:prstGeom prst="rect">
+            <a:avLst/>
+          </a:prstGeom>
+          <a:noFill/>
+        </p:spPr>
+        <p:txBody>
+          <a:bodyPr wrap="square" lIns="0" rIns="0" tIns="0" bIns="0">
+            <a:spAutoFit/>
+          </a:bodyPr>
+          <a:lstStyle/>
+          <a:p>
+            <a:pPr algn="l">
+              <a:lnSpc>
+                <a:spcPct val="125000"/>
+              </a:lnSpc>
+            </a:pPr>
+            <a:r>
+              <a:rPr sz="1200" b="0">
+                <a:solidFill>
+                  <a:srgbClr val="E5E0DF"/>
+                </a:solidFill>
+                <a:latin typeface="Roboto"/>
+              </a:rPr>
+              <a:t>The only state worth surviving a</a:t>
+            </a:r>
+          </a:p>
+          <a:p>
+            <a:pPr algn="l">
+              <a:lnSpc>
+                <a:spcPct val="125000"/>
+              </a:lnSpc>
+            </a:pPr>
+            <a:r>
+              <a:rPr sz="1200" b="0">
+                <a:solidFill>
+                  <a:srgbClr val="E5E0DF"/>
+                </a:solidFill>
+                <a:latin typeface="Roboto"/>
+              </a:rPr>
+              <a:t>restart. The raw session token is</a:t>
+            </a:r>
+          </a:p>
+          <a:p>
+            <a:pPr algn="l">
+              <a:lnSpc>
+                <a:spcPct val="125000"/>
+              </a:lnSpc>
+            </a:pPr>
+            <a:r>
+              <a:rPr sz="1200" b="0">
+                <a:solidFill>
+                  <a:srgbClr val="E5E0DF"/>
+                </a:solidFill>
+                <a:latin typeface="Roboto"/>
+              </a:rPr>
+              <a:t>returned once and never stored.</a:t>
+            </a:r>
+          </a:p>
+        </p:txBody>
+      </p:sp>
+      <p:sp>
+        <p:nvSpPr>
+          <p:cNvPr id="9" name="TextBox 8"/>
+          <p:cNvSpPr txBox="1"/>
+          <p:nvPr/>
+        </p:nvSpPr>
+        <p:spPr>
+          <a:xfrm>
+            <a:off x="658368" y="3840480"/>
+            <a:ext cx="3108960" cy="320040"/>
+          </a:xfrm>
+          <a:prstGeom prst="rect">
+            <a:avLst/>
+          </a:prstGeom>
+          <a:noFill/>
+        </p:spPr>
+        <p:txBody>
+          <a:bodyPr wrap="square" lIns="0" rIns="0" tIns="0" bIns="0">
+            <a:spAutoFit/>
+          </a:bodyPr>
+          <a:lstStyle/>
+          <a:p>
+            <a:pPr algn="l">
+              <a:lnSpc>
+                <a:spcPct val="100000"/>
+              </a:lnSpc>
+            </a:pPr>
+            <a:r>
+              <a:rPr sz="1700" b="0">
+                <a:solidFill>
+                  <a:srgbClr val="FFFFFF"/>
+                </a:solidFill>
+                <a:latin typeface="Saira Medium"/>
+              </a:rPr>
+              <a:t>Everything else is memory</a:t>
+            </a:r>
+          </a:p>
+        </p:txBody>
+      </p:sp>
+      <p:sp>
+        <p:nvSpPr>
+          <p:cNvPr id="10" name="TextBox 9"/>
+          <p:cNvSpPr txBox="1"/>
+          <p:nvPr/>
+        </p:nvSpPr>
+        <p:spPr>
+          <a:xfrm>
+            <a:off x="658368" y="4251960"/>
+            <a:ext cx="3108960" cy="1188720"/>
+          </a:xfrm>
+          <a:prstGeom prst="rect">
+            <a:avLst/>
+          </a:prstGeom>
+          <a:noFill/>
+        </p:spPr>
+        <p:txBody>
+          <a:bodyPr wrap="square" lIns="0" rIns="0" tIns="0" bIns="0">
+            <a:spAutoFit/>
+          </a:bodyPr>
+          <a:lstStyle/>
+          <a:p>
+            <a:pPr algn="l">
+              <a:lnSpc>
+                <a:spcPct val="125000"/>
+              </a:lnSpc>
+            </a:pPr>
+            <a:r>
+              <a:rPr sz="1200" b="0">
+                <a:solidFill>
+                  <a:srgbClr val="E5E0DF"/>
+                </a:solidFill>
+                <a:latin typeface="Roboto"/>
+              </a:rPr>
+              <a:t>A poll replaces the snapshot.</a:t>
+            </a:r>
+          </a:p>
+          <a:p>
+            <a:pPr algn="l">
+              <a:lnSpc>
+                <a:spcPct val="125000"/>
+              </a:lnSpc>
+            </a:pPr>
+            <a:r>
+              <a:rPr sz="1200" b="0">
+                <a:solidFill>
+                  <a:srgbClr val="E5E0DF"/>
+                </a:solidFill>
+                <a:latin typeface="Roboto"/>
+              </a:rPr>
+              <a:t>No schema migration for the thing</a:t>
+            </a:r>
+          </a:p>
+          <a:p>
+            <a:pPr algn="l">
+              <a:lnSpc>
+                <a:spcPct val="125000"/>
+              </a:lnSpc>
+            </a:pPr>
+            <a:r>
+              <a:rPr sz="1200" b="0">
+                <a:solidFill>
+                  <a:srgbClr val="E5E0DF"/>
+                </a:solidFill>
+                <a:latin typeface="Roboto"/>
+              </a:rPr>
+              <a:t>that changes most: a feed's shape.</a:t>
+            </a:r>
+          </a:p>
+        </p:txBody>
+      </p:sp>
+    </p:spTree>
+  </p:cSld>
+  <p:clrMapOvr>
+    <a:masterClrMapping/>
+  </p:clrMapOvr>
+</p:sld>
+</file>
+
+<file path=ppt/slides/slide13.xml><?xml version="1.0" encoding="utf-8"?>
+<p:sld xmlns:a="http://schemas.openxmlformats.org/drawingml/2006/main" xmlns:p="http://schemas.openxmlformats.org/presentationml/2006/main" xmlns:r="http://schemas.openxmlformats.org/officeDocument/2006/relationships">
+  <p:cSld>
+    <p:spTree>
+      <p:nvGrpSpPr>
+        <p:cNvPr id="1" name=""/>
+        <p:cNvGrpSpPr/>
+        <p:nvPr/>
+      </p:nvGrpSpPr>
+      <p:grpSpPr/>
+      <p:pic>
+        <p:nvPicPr>
+          <p:cNvPr id="2" name="Picture 1" descr="image.png"/>
+          <p:cNvPicPr>
+            <a:picLocks noChangeAspect="1"/>
+          </p:cNvPicPr>
+          <p:nvPr/>
+        </p:nvPicPr>
+        <p:blipFill>
+          <a:blip r:embed="rId2"/>
+          <a:stretch>
+            <a:fillRect/>
+          </a:stretch>
+        </p:blipFill>
+        <p:spPr>
+          <a:xfrm>
+            <a:off x="11027256" y="6531519"/>
+            <a:ext cx="1164744" cy="326481"/>
+          </a:xfrm>
+          <a:prstGeom prst="rect">
+            <a:avLst/>
+          </a:prstGeom>
+        </p:spPr>
+      </p:pic>
+      <p:sp>
+        <p:nvSpPr>
+          <p:cNvPr id="3" name="TextBox 2"/>
+          <p:cNvSpPr txBox="1"/>
+          <p:nvPr/>
+        </p:nvSpPr>
+        <p:spPr>
+          <a:xfrm>
+            <a:off x="658368" y="475488"/>
+            <a:ext cx="10872216" cy="640080"/>
+          </a:xfrm>
+          <a:prstGeom prst="rect">
+            <a:avLst/>
+          </a:prstGeom>
+          <a:noFill/>
+        </p:spPr>
+        <p:txBody>
+          <a:bodyPr wrap="square" lIns="0" rIns="0" tIns="0" bIns="0">
+            <a:spAutoFit/>
+          </a:bodyPr>
+          <a:lstStyle/>
+          <a:p>
+            <a:pPr algn="l">
+              <a:lnSpc>
+                <a:spcPct val="100000"/>
+              </a:lnSpc>
+            </a:pPr>
+            <a:r>
+              <a:rPr sz="3350" b="0">
+                <a:solidFill>
+                  <a:srgbClr val="FFFFFF"/>
+                </a:solidFill>
+                <a:latin typeface="Saira Medium"/>
+              </a:rPr>
+              <a:t>Why a second feed cost one file</a:t>
+            </a:r>
+          </a:p>
+        </p:txBody>
+      </p:sp>
+      <p:sp>
+        <p:nvSpPr>
+          <p:cNvPr id="4" name="TextBox 3"/>
+          <p:cNvSpPr txBox="1"/>
+          <p:nvPr/>
+        </p:nvSpPr>
+        <p:spPr>
+          <a:xfrm>
+            <a:off x="658368" y="1133856"/>
+            <a:ext cx="10872216" cy="566928"/>
+          </a:xfrm>
+          <a:prstGeom prst="rect">
+            <a:avLst/>
+          </a:prstGeom>
+          <a:noFill/>
+        </p:spPr>
+        <p:txBody>
+          <a:bodyPr wrap="square" lIns="0" rIns="0" tIns="0" bIns="0">
+            <a:spAutoFit/>
+          </a:bodyPr>
+          <a:lstStyle/>
+          <a:p>
+            <a:pPr algn="l">
+              <a:lnSpc>
+                <a:spcPct val="115000"/>
+              </a:lnSpc>
+            </a:pPr>
+            <a:r>
+              <a:rPr sz="1300" b="0">
+                <a:solidFill>
+                  <a:srgbClr val="E5E0DF"/>
+                </a:solidFill>
+                <a:latin typeface="Roboto"/>
+              </a:rPr>
+              <a:t>UnionProvider inherits Provider and holds two of them. A caller cannot tell a pair of feeds from a single feed — which is why losing a primary source changed nothing above ingestion.</a:t>
+            </a:r>
+          </a:p>
+        </p:txBody>
+      </p:sp>
+      <p:sp>
+        <p:nvSpPr>
+          <p:cNvPr id="5" name="Rounded Rectangle 4"/>
+          <p:cNvSpPr/>
+          <p:nvPr/>
+        </p:nvSpPr>
+        <p:spPr>
+          <a:xfrm>
+            <a:off x="2445137" y="1783080"/>
+            <a:ext cx="7271244" cy="4754880"/>
+          </a:xfrm>
+          <a:prstGeom prst="roundRect">
+            <a:avLst>
+              <a:gd name="adj" fmla="val 2000"/>
+            </a:avLst>
+          </a:prstGeom>
+          <a:solidFill>
+            <a:srgbClr val="FFFFFF"/>
+          </a:solidFill>
+          <a:ln w="12700">
+            <a:solidFill>
+              <a:srgbClr val="FC8337"/>
+            </a:solidFill>
+          </a:ln>
+          <a:effectLst/>
+        </p:spPr>
+        <p:style>
+          <a:lnRef idx="1">
+            <a:schemeClr val="accent1"/>
+          </a:lnRef>
+          <a:fillRef idx="3">
+            <a:schemeClr val="accent1"/>
+          </a:fillRef>
+          <a:effectRef idx="2">
+            <a:schemeClr val="accent1"/>
+          </a:effectRef>
+          <a:fontRef idx="minor">
+            <a:schemeClr val="lt1"/>
+          </a:fontRef>
+        </p:style>
+        <p:txBody>
+          <a:bodyPr rtlCol="0" anchor="ctr"/>
+          <a:lstStyle/>
+          <a:p>
+            <a:pPr algn="ctr"/>
+          </a:p>
+        </p:txBody>
+      </p:sp>
+      <p:pic>
+        <p:nvPicPr>
           <p:cNvPr id="6" name="Picture 5" descr="5-3-class-diagram.png"/>
           <p:cNvPicPr>
             <a:picLocks noChangeAspect="1"/>
@@ -2564,7 +3914,7 @@
 </p:sld>
 </file>
 
-<file path=ppt/slides/slide13.xml><?xml version="1.0" encoding="utf-8"?>
+<file path=ppt/slides/slide14.xml><?xml version="1.0" encoding="utf-8"?>
 <p:sld xmlns:a="http://schemas.openxmlformats.org/drawingml/2006/main" xmlns:p="http://schemas.openxmlformats.org/presentationml/2006/main" xmlns:r="http://schemas.openxmlformats.org/officeDocument/2006/relationships">
   <p:cSld>
     <p:spTree>
